--- a/docs/presentation/unpd_defense_presentation.pptx
+++ b/docs/presentation/unpd_defense_presentation.pptx
@@ -3112,7 +3112,7 @@
             <a:avLst/>
           </a:prstGeom>
           <a:solidFill>
-            <a:srgbClr val="0D1117"/>
+            <a:srgbClr val="0F172A"/>
           </a:solidFill>
           <a:ln>
             <a:noFill/>
@@ -3142,7 +3142,7 @@
       </p:sp>
       <p:sp>
         <p:nvSpPr>
-          <p:cNvPr id="3" name="Rounded Rectangle 2"/>
+          <p:cNvPr id="3" name="Rectangle 2"/>
           <p:cNvSpPr/>
           <p:nvPr/>
         </p:nvSpPr>
@@ -3151,15 +3151,15 @@
             <a:off x="914400" y="1097280"/>
             <a:ext cx="10362895" cy="4663440"/>
           </a:xfrm>
-          <a:prstGeom prst="roundRect">
+          <a:prstGeom prst="rect">
             <a:avLst/>
           </a:prstGeom>
           <a:solidFill>
-            <a:srgbClr val="161B22"/>
+            <a:srgbClr val="1E293B"/>
           </a:solidFill>
-          <a:ln w="15240">
+          <a:ln w="12700">
             <a:solidFill>
-              <a:srgbClr val="3B82F6"/>
+              <a:srgbClr val="334155"/>
             </a:solidFill>
           </a:ln>
         </p:spPr>
@@ -3209,66 +3209,70 @@
           <a:p>
             <a:pPr>
               <a:spcAft>
-                <a:spcPts val="1200"/>
+                <a:spcPts val="1400"/>
               </a:spcAft>
-              <a:defRPr sz="1300" b="1">
-                <a:solidFill>
-                  <a:srgbClr val="10B981"/>
-                </a:solidFill>
-                <a:latin typeface="Segoe UI"/>
-              </a:defRPr>
-            </a:pPr>
-            <a:r>
-              <a:t>НАУЧНО-ИНЖЕНЕРНАЯ ЗАЩИТА ПРОЕКТА</a:t>
-            </a:r>
-          </a:p>
-          <a:p>
-            <a:pPr>
-              <a:defRPr sz="3200" b="1">
-                <a:solidFill>
-                  <a:srgbClr val="F0F6FC"/>
-                </a:solidFill>
-                <a:latin typeface="Segoe UI"/>
-              </a:defRPr>
-            </a:pPr>
-            <a:r>
-              <a:t>Unsolicited Non-Paged Driver (UNPD)</a:t>
-            </a:r>
-          </a:p>
-          <a:p>
-            <a:pPr>
-              <a:spcBef>
-                <a:spcPts val="800"/>
-              </a:spcBef>
+              <a:defRPr sz="1100" b="1">
+                <a:solidFill>
+                  <a:srgbClr val="2DD4BF"/>
+                </a:solidFill>
+                <a:latin typeface="Calibri"/>
+              </a:defRPr>
+            </a:pPr>
+            <a:r>
+              <a:t>НАУЧНО-ИНЖЕНЕРНАЯ ДИССЕРТАЦИОННАЯ ПРЕЗЕНТАЦИЯ</a:t>
+            </a:r>
+          </a:p>
+          <a:p>
+            <a:pPr>
               <a:spcAft>
-                <a:spcPts val="2800"/>
+                <a:spcPts val="1800"/>
               </a:spcAft>
-              <a:defRPr sz="1600">
-                <a:solidFill>
-                  <a:srgbClr val="06B6D4"/>
-                </a:solidFill>
-                <a:latin typeface="Segoe UI"/>
-              </a:defRPr>
-            </a:pPr>
-            <a:r>
-              <a:t>Отказоустойчивый C++20 фреймворк драйвера режима ядра Windows NT x64,</a:t>
+              <a:defRPr sz="2600" b="1">
+                <a:solidFill>
+                  <a:srgbClr val="F8FAFC"/>
+                </a:solidFill>
+                <a:latin typeface="Calibri"/>
+              </a:defRPr>
+            </a:pPr>
+            <a:r>
+              <a:t>Архитектура высоконадежного драйвера ядра Windows x64</a:t>
             </a:r>
             <a:br/>
             <a:r>
-              <a:t>полиморфное управление памятью и 4-уровневый эмулятор MMU</a:t>
-            </a:r>
-          </a:p>
-          <a:p>
-            <a:pPr>
-              <a:defRPr sz="1200">
+              <a:t>на базе стандарта C++20 с полиморфным диспетчером памяти</a:t>
+            </a:r>
+            <a:br/>
+            <a:r>
+              <a:t>и 4-уровневой моделью трансляции MMU</a:t>
+            </a:r>
+          </a:p>
+          <a:p>
+            <a:pPr>
+              <a:spcAft>
+                <a:spcPts val="2400"/>
+              </a:spcAft>
+              <a:defRPr sz="1300">
+                <a:solidFill>
+                  <a:srgbClr val="60A5FA"/>
+                </a:solidFill>
+                <a:latin typeface="Calibri"/>
+              </a:defRPr>
+            </a:pPr>
+            <a:r>
+              <a:t>Проект: Unsolicited Non-Paged Driver (UNPD)  |  Специализация: Системное программирование и отказоустойчивые ОС</a:t>
+            </a:r>
+          </a:p>
+          <a:p>
+            <a:pPr>
+              <a:defRPr sz="1100">
                 <a:solidFill>
                   <a:srgbClr val="94A3B8"/>
                 </a:solidFill>
-                <a:latin typeface="Segoe UI"/>
-              </a:defRPr>
-            </a:pPr>
-            <a:r>
-              <a:t>Автор / Докладчик: EvilEmployer  |  Ветка: rework/production-kernel-v2  |  Статус: Production Ready (Verified)</a:t>
+                <a:latin typeface="Calibri"/>
+              </a:defRPr>
+            </a:pPr>
+            <a:r>
+              <a:t>Докладчик: EvilEmployer  |  Репозиторий: LucPrusPPi/unsolicited-non-paged-driver  |  Ветка: rework/production-kernel-v2</a:t>
             </a:r>
           </a:p>
         </p:txBody>
@@ -3306,7 +3310,7 @@
             <a:avLst/>
           </a:prstGeom>
           <a:solidFill>
-            <a:srgbClr val="0D1117"/>
+            <a:srgbClr val="0F172A"/>
           </a:solidFill>
           <a:ln>
             <a:noFill/>
@@ -3343,7 +3347,7 @@
         <p:spPr>
           <a:xfrm>
             <a:off x="731520" y="365760"/>
-            <a:ext cx="10698480" cy="274320"/>
+            <a:ext cx="10698480" cy="228600"/>
           </a:xfrm>
           <a:prstGeom prst="rect">
             <a:avLst/>
@@ -3357,15 +3361,15 @@
           <a:lstStyle/>
           <a:p>
             <a:pPr>
-              <a:defRPr sz="1100" b="1">
-                <a:solidFill>
-                  <a:srgbClr val="10B981"/>
-                </a:solidFill>
-                <a:latin typeface="Segoe UI"/>
-              </a:defRPr>
-            </a:pPr>
-            <a:r>
-              <a:t>UNPD АКАДЕМИЧЕСКАЯ ЗАЩИТА</a:t>
+              <a:defRPr sz="1000" b="1">
+                <a:solidFill>
+                  <a:srgbClr val="2DD4BF"/>
+                </a:solidFill>
+                <a:latin typeface="Calibri"/>
+              </a:defRPr>
+            </a:pPr>
+            <a:r>
+              <a:t>РАЗДЕЛ 9</a:t>
             </a:r>
           </a:p>
         </p:txBody>
@@ -3378,8 +3382,8 @@
         </p:nvSpPr>
         <p:spPr>
           <a:xfrm>
-            <a:off x="731520" y="640080"/>
-            <a:ext cx="10698480" cy="548640"/>
+            <a:off x="731520" y="594360"/>
+            <a:ext cx="10698480" cy="502920"/>
           </a:xfrm>
           <a:prstGeom prst="rect">
             <a:avLst/>
@@ -3393,39 +3397,39 @@
           <a:lstStyle/>
           <a:p>
             <a:pPr>
-              <a:defRPr sz="2200" b="1">
-                <a:solidFill>
-                  <a:srgbClr val="F0F6FC"/>
-                </a:solidFill>
-                <a:latin typeface="Segoe UI"/>
-              </a:defRPr>
-            </a:pPr>
-            <a:r>
-              <a:t>9. Заключение и Научно-Практическая Ценность</a:t>
-            </a:r>
-          </a:p>
-        </p:txBody>
-      </p:sp>
-      <p:sp>
-        <p:nvSpPr>
-          <p:cNvPr id="5" name="Rounded Rectangle 4"/>
+              <a:defRPr sz="2000" b="1">
+                <a:solidFill>
+                  <a:srgbClr val="F8FAFC"/>
+                </a:solidFill>
+                <a:latin typeface="Calibri"/>
+              </a:defRPr>
+            </a:pPr>
+            <a:r>
+              <a:t>Заключение и выводы квалификационной работы</a:t>
+            </a:r>
+          </a:p>
+        </p:txBody>
+      </p:sp>
+      <p:sp>
+        <p:nvSpPr>
+          <p:cNvPr id="5" name="Rectangle 4"/>
           <p:cNvSpPr/>
           <p:nvPr/>
         </p:nvSpPr>
         <p:spPr>
           <a:xfrm>
             <a:off x="914400" y="1280160"/>
-            <a:ext cx="10362895" cy="4846320"/>
-          </a:xfrm>
-          <a:prstGeom prst="roundRect">
+            <a:ext cx="10362895" cy="4937760"/>
+          </a:xfrm>
+          <a:prstGeom prst="rect">
             <a:avLst/>
           </a:prstGeom>
           <a:solidFill>
-            <a:srgbClr val="161B22"/>
+            <a:srgbClr val="1E293B"/>
           </a:solidFill>
-          <a:ln w="15240">
+          <a:ln w="12700">
             <a:solidFill>
-              <a:srgbClr val="10B981"/>
+              <a:srgbClr val="334155"/>
             </a:solidFill>
           </a:ln>
         </p:spPr>
@@ -3460,7 +3464,7 @@
         <p:spPr>
           <a:xfrm>
             <a:off x="1280160" y="1645920"/>
-            <a:ext cx="9601200" cy="4206240"/>
+            <a:ext cx="9601200" cy="4389120"/>
           </a:xfrm>
           <a:prstGeom prst="rect">
             <a:avLst/>
@@ -3477,15 +3481,15 @@
               <a:spcAft>
                 <a:spcPts val="1200"/>
               </a:spcAft>
-              <a:defRPr sz="1300" b="1">
-                <a:solidFill>
-                  <a:srgbClr val="10B981"/>
-                </a:solidFill>
-                <a:latin typeface="Segoe UI"/>
-              </a:defRPr>
-            </a:pPr>
-            <a:r>
-              <a:t>КЛЮЧЕВЫЕ НАУЧНО-ИНЖЕНЕРНЫЕ ДОСТИЖЕНИЯ ПРОЕКТА</a:t>
+              <a:defRPr sz="1200" b="1">
+                <a:solidFill>
+                  <a:srgbClr val="2DD4BF"/>
+                </a:solidFill>
+                <a:latin typeface="Calibri"/>
+              </a:defRPr>
+            </a:pPr>
+            <a:r>
+              <a:t>ОСНОВНЫЕ НАУЧНО-ПРАКТИЧЕСКИЕ РЕЗУЛЬТАТЫ</a:t>
             </a:r>
           </a:p>
           <a:p>
@@ -3495,9 +3499,9 @@
               </a:spcAft>
               <a:defRPr sz="1100" b="1">
                 <a:solidFill>
-                  <a:srgbClr val="F0F6FC"/>
-                </a:solidFill>
-                <a:latin typeface="Segoe UI"/>
+                  <a:srgbClr val="F8FAFC"/>
+                </a:solidFill>
+                <a:latin typeface="Calibri"/>
               </a:defRPr>
             </a:pPr>
             <a:r>
@@ -3510,7 +3514,7 @@
                   <a:srgbClr val="94A3B8"/>
                 </a:solidFill>
               </a:rPr>
-              <a:t>  Создан законченный, строгий C++20 шаблон драйвера ядра Windows x64 с полиморфной архитектурой памяти, пригодный для тиражирования и учебных/исследовательских целей.
+              <a:t>  Разработан строгий C++20 шаблон драйвера ядра Windows x64 с полиморфной архитектурой памяти, пригодный для использования в качестве эталонного фреймворка в академических и исследовательских целях.
 </a:t>
             </a:r>
           </a:p>
@@ -3521,9 +3525,9 @@
               </a:spcAft>
               <a:defRPr sz="1100" b="1">
                 <a:solidFill>
-                  <a:srgbClr val="F0F6FC"/>
-                </a:solidFill>
-                <a:latin typeface="Segoe UI"/>
+                  <a:srgbClr val="F8FAFC"/>
+                </a:solidFill>
+                <a:latin typeface="Calibri"/>
               </a:defRPr>
             </a:pPr>
             <a:r>
@@ -3536,7 +3540,7 @@
                   <a:srgbClr val="94A3B8"/>
                 </a:solidFill>
               </a:rPr>
-              <a:t>  Полная изоляция всех путей исполнения исключает возникновение BSOD при любых воздействиях и сбоях пользовательского режима.
+              <a:t>  Полная SEH-изоляция и валидация границ исключают возникновение системных сбоев (BSOD) при любых некорректных данных со стороны пользовательского режима.
 </a:t>
             </a:r>
           </a:p>
@@ -3547,13 +3551,13 @@
               </a:spcAft>
               <a:defRPr sz="1100" b="1">
                 <a:solidFill>
-                  <a:srgbClr val="F0F6FC"/>
-                </a:solidFill>
-                <a:latin typeface="Segoe UI"/>
-              </a:defRPr>
-            </a:pPr>
-            <a:r>
-              <a:t>3. 100% Воспроизводимость в CI без гипервизора:</a:t>
+                  <a:srgbClr val="F8FAFC"/>
+                </a:solidFill>
+                <a:latin typeface="Calibri"/>
+              </a:defRPr>
+            </a:pPr>
+            <a:r>
+              <a:t>3. Полная воспроизводимость верификации без гипервизора:</a:t>
             </a:r>
             <a:br/>
             <a:r>
@@ -3573,13 +3577,13 @@
               </a:spcAft>
               <a:defRPr sz="1100" b="1">
                 <a:solidFill>
-                  <a:srgbClr val="F0F6FC"/>
-                </a:solidFill>
-                <a:latin typeface="Segoe UI"/>
-              </a:defRPr>
-            </a:pPr>
-            <a:r>
-              <a:t>4. Высочайшая производительность:</a:t>
+                  <a:srgbClr val="F8FAFC"/>
+                </a:solidFill>
+                <a:latin typeface="Calibri"/>
+              </a:defRPr>
+            </a:pPr>
+            <a:r>
+              <a:t>4. Высокая производительность межмодульного взаимодействия:</a:t>
             </a:r>
             <a:br/>
             <a:r>
@@ -3588,7 +3592,7 @@
                   <a:srgbClr val="94A3B8"/>
                 </a:solidFill>
               </a:rPr>
-              <a:t>  Субмикросекундный отклик (0.39 µs) и lockless ring-буфер с барьерами MASM64 обеспечивают работу в режиме реального времени.
+              <a:t>  Субмикросекундный отклик (0.39 µs) и lockless ring-буфер с барьерами MASM64 обеспечивают обработку потока данных в реальном времени.
 </a:t>
             </a:r>
           </a:p>
@@ -3597,15 +3601,15 @@
               <a:spcBef>
                 <a:spcPts val="800"/>
               </a:spcBef>
-              <a:defRPr sz="1200" b="1">
-                <a:solidFill>
-                  <a:srgbClr val="06B6D4"/>
-                </a:solidFill>
-                <a:latin typeface="Segoe UI"/>
-              </a:defRPr>
-            </a:pPr>
-            <a:r>
-              <a:t>ДОКЛАД ОКОНЧЕН. СПАСИБО ЗА ВНИМАНИЕ! ГОТОВ К ОТВЕТАМ НА ВОПРОСЫ.</a:t>
+              <a:defRPr sz="1100" b="1">
+                <a:solidFill>
+                  <a:srgbClr val="60A5FA"/>
+                </a:solidFill>
+                <a:latin typeface="Calibri"/>
+              </a:defRPr>
+            </a:pPr>
+            <a:r>
+              <a:t>ДОКЛАД ОКОНЧЕН. СПАСИБО ЗА ВНИМАНИЕ! ГОТОВ К ОТВЕТАМ НА ВОПРОСЫ КОМИССИИ.</a:t>
             </a:r>
           </a:p>
         </p:txBody>
@@ -3643,7 +3647,7 @@
             <a:avLst/>
           </a:prstGeom>
           <a:solidFill>
-            <a:srgbClr val="0D1117"/>
+            <a:srgbClr val="0F172A"/>
           </a:solidFill>
           <a:ln>
             <a:noFill/>
@@ -3680,7 +3684,7 @@
         <p:spPr>
           <a:xfrm>
             <a:off x="731520" y="365760"/>
-            <a:ext cx="10698480" cy="274320"/>
+            <a:ext cx="10698480" cy="228600"/>
           </a:xfrm>
           <a:prstGeom prst="rect">
             <a:avLst/>
@@ -3694,15 +3698,15 @@
           <a:lstStyle/>
           <a:p>
             <a:pPr>
-              <a:defRPr sz="1100" b="1">
-                <a:solidFill>
-                  <a:srgbClr val="10B981"/>
-                </a:solidFill>
-                <a:latin typeface="Segoe UI"/>
-              </a:defRPr>
-            </a:pPr>
-            <a:r>
-              <a:t>UNPD АКАДЕМИЧЕСКАЯ ЗАЩИТА</a:t>
+              <a:defRPr sz="1000" b="1">
+                <a:solidFill>
+                  <a:srgbClr val="2DD4BF"/>
+                </a:solidFill>
+                <a:latin typeface="Calibri"/>
+              </a:defRPr>
+            </a:pPr>
+            <a:r>
+              <a:t>РАЗДЕЛ 1</a:t>
             </a:r>
           </a:p>
         </p:txBody>
@@ -3715,8 +3719,8 @@
         </p:nvSpPr>
         <p:spPr>
           <a:xfrm>
-            <a:off x="731520" y="640080"/>
-            <a:ext cx="10698480" cy="548640"/>
+            <a:off x="731520" y="594360"/>
+            <a:ext cx="10698480" cy="502920"/>
           </a:xfrm>
           <a:prstGeom prst="rect">
             <a:avLst/>
@@ -3730,39 +3734,39 @@
           <a:lstStyle/>
           <a:p>
             <a:pPr>
-              <a:defRPr sz="2200" b="1">
-                <a:solidFill>
-                  <a:srgbClr val="F0F6FC"/>
-                </a:solidFill>
-                <a:latin typeface="Segoe UI"/>
-              </a:defRPr>
-            </a:pPr>
-            <a:r>
-              <a:t>1. Актуальность, Проблематика и Научные Цели</a:t>
-            </a:r>
-          </a:p>
-        </p:txBody>
-      </p:sp>
-      <p:sp>
-        <p:nvSpPr>
-          <p:cNvPr id="5" name="Rounded Rectangle 4"/>
+              <a:defRPr sz="2000" b="1">
+                <a:solidFill>
+                  <a:srgbClr val="F8FAFC"/>
+                </a:solidFill>
+                <a:latin typeface="Calibri"/>
+              </a:defRPr>
+            </a:pPr>
+            <a:r>
+              <a:t>Постановка проблемы и научные цели исследования</a:t>
+            </a:r>
+          </a:p>
+        </p:txBody>
+      </p:sp>
+      <p:sp>
+        <p:nvSpPr>
+          <p:cNvPr id="5" name="Rectangle 4"/>
           <p:cNvSpPr/>
           <p:nvPr/>
         </p:nvSpPr>
         <p:spPr>
           <a:xfrm>
-            <a:off x="731520" y="1371600"/>
-            <a:ext cx="5120640" cy="4846320"/>
-          </a:xfrm>
-          <a:prstGeom prst="roundRect">
+            <a:off x="731520" y="1280160"/>
+            <a:ext cx="5120640" cy="4937760"/>
+          </a:xfrm>
+          <a:prstGeom prst="rect">
             <a:avLst/>
           </a:prstGeom>
           <a:solidFill>
-            <a:srgbClr val="161B22"/>
+            <a:srgbClr val="1E293B"/>
           </a:solidFill>
-          <a:ln w="15240">
+          <a:ln w="12700">
             <a:solidFill>
-              <a:srgbClr val="EF4444"/>
+              <a:srgbClr val="334155"/>
             </a:solidFill>
           </a:ln>
         </p:spPr>
@@ -3796,8 +3800,8 @@
         </p:nvSpPr>
         <p:spPr>
           <a:xfrm>
-            <a:off x="914400" y="1508760"/>
-            <a:ext cx="4754879" cy="365760"/>
+            <a:off x="960120" y="1417319"/>
+            <a:ext cx="4663440" cy="320040"/>
           </a:xfrm>
           <a:prstGeom prst="rect">
             <a:avLst/>
@@ -3811,15 +3815,15 @@
           <a:lstStyle/>
           <a:p>
             <a:pPr>
-              <a:defRPr sz="1300" b="1">
-                <a:solidFill>
-                  <a:srgbClr val="06B6D4"/>
-                </a:solidFill>
-                <a:latin typeface="Segoe UI"/>
-              </a:defRPr>
-            </a:pPr>
-            <a:r>
-              <a:t>⚠️ Проблематика разработки Ring-0</a:t>
+              <a:defRPr sz="1100" b="1">
+                <a:solidFill>
+                  <a:srgbClr val="60A5FA"/>
+                </a:solidFill>
+                <a:latin typeface="Calibri"/>
+              </a:defRPr>
+            </a:pPr>
+            <a:r>
+              <a:t>ПРОБЛЕМАТИКА ТРАДИЦИОННОЙ РАЗРАБОТКИ ЯДРА</a:t>
             </a:r>
           </a:p>
         </p:txBody>
@@ -3832,8 +3836,8 @@
         </p:nvSpPr>
         <p:spPr>
           <a:xfrm>
-            <a:off x="914400" y="1920240"/>
-            <a:ext cx="4754880" cy="4114800"/>
+            <a:off x="960120" y="1783080"/>
+            <a:ext cx="4663440" cy="4206240"/>
           </a:xfrm>
           <a:prstGeom prst="rect">
             <a:avLst/>
@@ -3850,15 +3854,15 @@
               <a:spcAft>
                 <a:spcPts val="800"/>
               </a:spcAft>
-              <a:defRPr sz="1100" b="1">
-                <a:solidFill>
-                  <a:srgbClr val="F0F6FC"/>
-                </a:solidFill>
-                <a:latin typeface="Segoe UI"/>
-              </a:defRPr>
-            </a:pPr>
-            <a:r>
-              <a:t>• C-Style Архаизмы: </a:t>
+              <a:defRPr sz="1050" b="1">
+                <a:solidFill>
+                  <a:srgbClr val="F8FAFC"/>
+                </a:solidFill>
+                <a:latin typeface="Calibri"/>
+              </a:defRPr>
+            </a:pPr>
+            <a:r>
+              <a:t>1.1. Небезопасность процедурного C-подхода: </a:t>
             </a:r>
             <a:r>
               <a:rPr b="0">
@@ -3866,7 +3870,7 @@
                   <a:srgbClr val="94A3B8"/>
                 </a:solidFill>
               </a:rPr>
-              <a:t>Фрагментированный код без RAII приводит к утечкам пула памяти (Pool Leaks) и UAF-уязвимостям.</a:t>
+              <a:t>Отсутствие инкапсуляции и деструкторов в традиционном коде ядра влечет риск утечек ресурсов (Pool Leaks) и повторного освобождения (Double Free).</a:t>
             </a:r>
           </a:p>
           <a:p>
@@ -3874,15 +3878,15 @@
               <a:spcAft>
                 <a:spcPts val="800"/>
               </a:spcAft>
-              <a:defRPr sz="1100" b="1">
-                <a:solidFill>
-                  <a:srgbClr val="F0F6FC"/>
-                </a:solidFill>
-                <a:latin typeface="Segoe UI"/>
-              </a:defRPr>
-            </a:pPr>
-            <a:r>
-              <a:t>• Запрет STL/Исключений в Ядре: </a:t>
+              <a:defRPr sz="1050" b="1">
+                <a:solidFill>
+                  <a:srgbClr val="F8FAFC"/>
+                </a:solidFill>
+                <a:latin typeface="Calibri"/>
+              </a:defRPr>
+            </a:pPr>
+            <a:r>
+              <a:t>1.2. Ограничения среды исполнения Ring-0: </a:t>
             </a:r>
             <a:r>
               <a:rPr b="0">
@@ -3890,7 +3894,7 @@
                   <a:srgbClr val="94A3B8"/>
                 </a:solidFill>
               </a:rPr>
-              <a:t>Невозможность использовать стандартные C++ контейнеры и RTTI в режиме ядра Windows NT.</a:t>
+              <a:t>Аппаратный запрет механизма C++ исключений и RTTI в режиме ядра вынуждает применять небезопасные C-паттерны при обработке системных ошибок.</a:t>
             </a:r>
           </a:p>
           <a:p>
@@ -3898,15 +3902,15 @@
               <a:spcAft>
                 <a:spcPts val="800"/>
               </a:spcAft>
-              <a:defRPr sz="1100" b="1">
-                <a:solidFill>
-                  <a:srgbClr val="F0F6FC"/>
-                </a:solidFill>
-                <a:latin typeface="Segoe UI"/>
-              </a:defRPr>
-            </a:pPr>
-            <a:r>
-              <a:t>• Сложность Модульного Тестирования: </a:t>
+              <a:defRPr sz="1050" b="1">
+                <a:solidFill>
+                  <a:srgbClr val="F8FAFC"/>
+                </a:solidFill>
+                <a:latin typeface="Calibri"/>
+              </a:defRPr>
+            </a:pPr>
+            <a:r>
+              <a:t>1.3. Высокая латентность IPC и переключения контекста: </a:t>
             </a:r>
             <a:r>
               <a:rPr b="0">
@@ -3914,7 +3918,7 @@
                   <a:srgbClr val="94A3B8"/>
                 </a:solidFill>
               </a:rPr>
-              <a:t>Необходимость физической виртуальной машины и WinDbg для тестирования трансляции страниц (PML4).</a:t>
+              <a:t>Классический ввод-вывод IRP требует постоянного копирования буферов и смены уровней привилегий, снижая пропускную способность потока данных.</a:t>
             </a:r>
           </a:p>
           <a:p>
@@ -3922,15 +3926,15 @@
               <a:spcAft>
                 <a:spcPts val="800"/>
               </a:spcAft>
-              <a:defRPr sz="1100" b="1">
-                <a:solidFill>
-                  <a:srgbClr val="F0F6FC"/>
-                </a:solidFill>
-                <a:latin typeface="Segoe UI"/>
-              </a:defRPr>
-            </a:pPr>
-            <a:r>
-              <a:t>• Уязвимость к BSOD (BugChecks): </a:t>
+              <a:defRPr sz="1050" b="1">
+                <a:solidFill>
+                  <a:srgbClr val="F8FAFC"/>
+                </a:solidFill>
+                <a:latin typeface="Calibri"/>
+              </a:defRPr>
+            </a:pPr>
+            <a:r>
+              <a:t>1.4. Сложность автономной верификации без гипервизора: </a:t>
             </a:r>
             <a:r>
               <a:rPr b="0">
@@ -3938,31 +3942,31 @@
                   <a:srgbClr val="94A3B8"/>
                 </a:solidFill>
               </a:rPr>
-              <a:t>Ошибки IRQL (0x0A, 0xD1) и Page Faults (0x50) при некорректном разборе структур.</a:t>
-            </a:r>
-          </a:p>
-        </p:txBody>
-      </p:sp>
-      <p:sp>
-        <p:nvSpPr>
-          <p:cNvPr id="8" name="Rounded Rectangle 7"/>
+              <a:t>Отсутствие эмуляции таблиц страниц x86-64 в юзермоде делает модульное тестирование в CI невозможным без физической ВМ и отладчика WinDbg.</a:t>
+            </a:r>
+          </a:p>
+        </p:txBody>
+      </p:sp>
+      <p:sp>
+        <p:nvSpPr>
+          <p:cNvPr id="8" name="Rectangle 7"/>
           <p:cNvSpPr/>
           <p:nvPr/>
         </p:nvSpPr>
         <p:spPr>
           <a:xfrm>
-            <a:off x="6217920" y="1371600"/>
-            <a:ext cx="5212080" cy="4846320"/>
-          </a:xfrm>
-          <a:prstGeom prst="roundRect">
+            <a:off x="6217920" y="1280160"/>
+            <a:ext cx="5212080" cy="4937760"/>
+          </a:xfrm>
+          <a:prstGeom prst="rect">
             <a:avLst/>
           </a:prstGeom>
           <a:solidFill>
-            <a:srgbClr val="161B22"/>
+            <a:srgbClr val="1E293B"/>
           </a:solidFill>
-          <a:ln w="15240">
+          <a:ln w="12700">
             <a:solidFill>
-              <a:srgbClr val="10B981"/>
+              <a:srgbClr val="334155"/>
             </a:solidFill>
           </a:ln>
         </p:spPr>
@@ -3996,8 +4000,8 @@
         </p:nvSpPr>
         <p:spPr>
           <a:xfrm>
-            <a:off x="6400800" y="1508760"/>
-            <a:ext cx="4846320" cy="365760"/>
+            <a:off x="6446520" y="1417319"/>
+            <a:ext cx="4754880" cy="320040"/>
           </a:xfrm>
           <a:prstGeom prst="rect">
             <a:avLst/>
@@ -4011,15 +4015,15 @@
           <a:lstStyle/>
           <a:p>
             <a:pPr>
-              <a:defRPr sz="1300" b="1">
-                <a:solidFill>
-                  <a:srgbClr val="06B6D4"/>
-                </a:solidFill>
-                <a:latin typeface="Segoe UI"/>
-              </a:defRPr>
-            </a:pPr>
-            <a:r>
-              <a:t>✅ Решения, внедренные в UNPD</a:t>
+              <a:defRPr sz="1100" b="1">
+                <a:solidFill>
+                  <a:srgbClr val="60A5FA"/>
+                </a:solidFill>
+                <a:latin typeface="Calibri"/>
+              </a:defRPr>
+            </a:pPr>
+            <a:r>
+              <a:t>НАУЧНО-ИНЖЕНЕРНЫЕ РЕШЕНИЯ ПРОЕКТА UNPD</a:t>
             </a:r>
           </a:p>
         </p:txBody>
@@ -4032,8 +4036,8 @@
         </p:nvSpPr>
         <p:spPr>
           <a:xfrm>
-            <a:off x="6400800" y="1920240"/>
-            <a:ext cx="4846320" cy="4114800"/>
+            <a:off x="6446520" y="1783080"/>
+            <a:ext cx="4754880" cy="4206240"/>
           </a:xfrm>
           <a:prstGeom prst="rect">
             <a:avLst/>
@@ -4050,15 +4054,15 @@
               <a:spcAft>
                 <a:spcPts val="800"/>
               </a:spcAft>
-              <a:defRPr sz="1100" b="1">
-                <a:solidFill>
-                  <a:srgbClr val="10B981"/>
-                </a:solidFill>
-                <a:latin typeface="Segoe UI"/>
-              </a:defRPr>
-            </a:pPr>
-            <a:r>
-              <a:t>• Freestanding C++20 Ядро (kstd): </a:t>
+              <a:defRPr sz="1050" b="1">
+                <a:solidFill>
+                  <a:srgbClr val="2DD4BF"/>
+                </a:solidFill>
+                <a:latin typeface="Calibri"/>
+              </a:defRPr>
+            </a:pPr>
+            <a:r>
+              <a:t>2.1. Freestanding ядро C++20 (kstd): </a:t>
             </a:r>
             <a:r>
               <a:rPr b="0">
@@ -4066,7 +4070,7 @@
                   <a:srgbClr val="94A3B8"/>
                 </a:solidFill>
               </a:rPr>
-              <a:t>Собственные реализации span, expected, unique_ptr и концептов без CRT/STL.</a:t>
+              <a:t>Реализация легковесных RAII-контейнеров, умных указателей и монады expected без зависимостей от стандартного C-Runtime ядра.</a:t>
             </a:r>
           </a:p>
           <a:p>
@@ -4074,15 +4078,15 @@
               <a:spcAft>
                 <a:spcPts val="800"/>
               </a:spcAft>
-              <a:defRPr sz="1100" b="1">
-                <a:solidFill>
-                  <a:srgbClr val="10B981"/>
-                </a:solidFill>
-                <a:latin typeface="Segoe UI"/>
-              </a:defRPr>
-            </a:pPr>
-            <a:r>
-              <a:t>• Полиморфная память (IMemoryEngine): </a:t>
+              <a:defRPr sz="1050" b="1">
+                <a:solidFill>
+                  <a:srgbClr val="2DD4BF"/>
+                </a:solidFill>
+                <a:latin typeface="Calibri"/>
+              </a:defRPr>
+            </a:pPr>
+            <a:r>
+              <a:t>2.2. Полиморфная стратегия памяти (IMemoryEngine): </a:t>
             </a:r>
             <a:r>
               <a:rPr b="0">
@@ -4090,7 +4094,7 @@
                   <a:srgbClr val="94A3B8"/>
                 </a:solidFill>
               </a:rPr>
-              <a:t>Унификация MDL Zero-Copy, 4-классовых Lookaside слэбов, пула и Neither I/O.</a:t>
+              <a:t>Объектно-ориентированная абстракция над MDL Zero-Copy, 4-классовыми Lookaside-кэшами и динамически отслеживаемым NonPagedPoolNx.</a:t>
             </a:r>
           </a:p>
           <a:p>
@@ -4098,15 +4102,15 @@
               <a:spcAft>
                 <a:spcPts val="800"/>
               </a:spcAft>
-              <a:defRPr sz="1100" b="1">
-                <a:solidFill>
-                  <a:srgbClr val="10B981"/>
-                </a:solidFill>
-                <a:latin typeface="Segoe UI"/>
-              </a:defRPr>
-            </a:pPr>
-            <a:r>
-              <a:t>• 4-Уровневый разбор MMU x86-64: </a:t>
+              <a:defRPr sz="1050" b="1">
+                <a:solidFill>
+                  <a:srgbClr val="2DD4BF"/>
+                </a:solidFill>
+                <a:latin typeface="Calibri"/>
+              </a:defRPr>
+            </a:pPr>
+            <a:r>
+              <a:t>2.3. Аппаратно-точный 4-уровневый разбор MMU x86-64: </a:t>
             </a:r>
             <a:r>
               <a:rPr b="0">
@@ -4114,7 +4118,7 @@
                   <a:srgbClr val="94A3B8"/>
                 </a:solidFill>
               </a:rPr>
-              <a:t>CR3 Walker с поддержкой 1GB Huge, 2MB Large и 4KB Small страниц + Page Clamping.</a:t>
+              <a:t>Алгоритм трансляции CR3 PML4 -&gt; PDPTE -&gt; PDE -&gt; PTE с поддержкой супер-страниц 1GB/2MB и побайтовым чанкингом границ страниц.</a:t>
             </a:r>
           </a:p>
           <a:p>
@@ -4122,15 +4126,15 @@
               <a:spcAft>
                 <a:spcPts val="800"/>
               </a:spcAft>
-              <a:defRPr sz="1100" b="1">
-                <a:solidFill>
-                  <a:srgbClr val="10B981"/>
-                </a:solidFill>
-                <a:latin typeface="Segoe UI"/>
-              </a:defRPr>
-            </a:pPr>
-            <a:r>
-              <a:t>• Virtual MMU 64MB Sandbox: </a:t>
+              <a:defRPr sz="1050" b="1">
+                <a:solidFill>
+                  <a:srgbClr val="2DD4BF"/>
+                </a:solidFill>
+                <a:latin typeface="Calibri"/>
+              </a:defRPr>
+            </a:pPr>
+            <a:r>
+              <a:t>2.4. Изолированный 64MB эмулятор Virtual MMU Sandbox: </a:t>
             </a:r>
             <a:r>
               <a:rPr b="0">
@@ -4138,7 +4142,7 @@
                   <a:srgbClr val="94A3B8"/>
                 </a:solidFill>
               </a:rPr>
-              <a:t>Автономный эмулятор физической памяти и TLB с генерацией #PF в CI без гипервизора.</a:t>
+              <a:t>Модульный стенд в юзермоде для детерминированного тестирования трансляции страниц и аппаратных прерываний #PF в GitHub CI.</a:t>
             </a:r>
           </a:p>
         </p:txBody>
@@ -4176,7 +4180,7 @@
             <a:avLst/>
           </a:prstGeom>
           <a:solidFill>
-            <a:srgbClr val="0D1117"/>
+            <a:srgbClr val="0F172A"/>
           </a:solidFill>
           <a:ln>
             <a:noFill/>
@@ -4213,7 +4217,7 @@
         <p:spPr>
           <a:xfrm>
             <a:off x="731520" y="365760"/>
-            <a:ext cx="10698480" cy="274320"/>
+            <a:ext cx="10698480" cy="228600"/>
           </a:xfrm>
           <a:prstGeom prst="rect">
             <a:avLst/>
@@ -4227,15 +4231,15 @@
           <a:lstStyle/>
           <a:p>
             <a:pPr>
-              <a:defRPr sz="1100" b="1">
-                <a:solidFill>
-                  <a:srgbClr val="10B981"/>
-                </a:solidFill>
-                <a:latin typeface="Segoe UI"/>
-              </a:defRPr>
-            </a:pPr>
-            <a:r>
-              <a:t>UNPD АКАДЕМИЧЕСКАЯ ЗАЩИТА</a:t>
+              <a:defRPr sz="1000" b="1">
+                <a:solidFill>
+                  <a:srgbClr val="2DD4BF"/>
+                </a:solidFill>
+                <a:latin typeface="Calibri"/>
+              </a:defRPr>
+            </a:pPr>
+            <a:r>
+              <a:t>РАЗДЕЛ 2</a:t>
             </a:r>
           </a:p>
         </p:txBody>
@@ -4248,8 +4252,8 @@
         </p:nvSpPr>
         <p:spPr>
           <a:xfrm>
-            <a:off x="731520" y="640080"/>
-            <a:ext cx="10698480" cy="548640"/>
+            <a:off x="731520" y="594360"/>
+            <a:ext cx="10698480" cy="502920"/>
           </a:xfrm>
           <a:prstGeom prst="rect">
             <a:avLst/>
@@ -4263,39 +4267,39 @@
           <a:lstStyle/>
           <a:p>
             <a:pPr>
-              <a:defRPr sz="2200" b="1">
-                <a:solidFill>
-                  <a:srgbClr val="F0F6FC"/>
-                </a:solidFill>
-                <a:latin typeface="Segoe UI"/>
-              </a:defRPr>
-            </a:pPr>
-            <a:r>
-              <a:t>2. Сквозная Монолитная Архитектура Системы</a:t>
-            </a:r>
-          </a:p>
-        </p:txBody>
-      </p:sp>
-      <p:sp>
-        <p:nvSpPr>
-          <p:cNvPr id="5" name="Rounded Rectangle 4"/>
+              <a:defRPr sz="2000" b="1">
+                <a:solidFill>
+                  <a:srgbClr val="F8FAFC"/>
+                </a:solidFill>
+                <a:latin typeface="Calibri"/>
+              </a:defRPr>
+            </a:pPr>
+            <a:r>
+              <a:t>Сквозная архитектурная топология системы</a:t>
+            </a:r>
+          </a:p>
+        </p:txBody>
+      </p:sp>
+      <p:sp>
+        <p:nvSpPr>
+          <p:cNvPr id="5" name="Rectangle 4"/>
           <p:cNvSpPr/>
           <p:nvPr/>
         </p:nvSpPr>
         <p:spPr>
           <a:xfrm>
-            <a:off x="731520" y="1371600"/>
+            <a:off x="731520" y="1280160"/>
             <a:ext cx="10698480" cy="1463040"/>
           </a:xfrm>
-          <a:prstGeom prst="roundRect">
+          <a:prstGeom prst="rect">
             <a:avLst/>
           </a:prstGeom>
           <a:solidFill>
-            <a:srgbClr val="161B22"/>
+            <a:srgbClr val="1E293B"/>
           </a:solidFill>
-          <a:ln w="15240">
+          <a:ln w="12700">
             <a:solidFill>
-              <a:srgbClr val="3B82F6"/>
+              <a:srgbClr val="334155"/>
             </a:solidFill>
           </a:ln>
         </p:spPr>
@@ -4329,8 +4333,8 @@
         </p:nvSpPr>
         <p:spPr>
           <a:xfrm>
-            <a:off x="914400" y="1508760"/>
-            <a:ext cx="10332719" cy="365760"/>
+            <a:off x="960120" y="1417319"/>
+            <a:ext cx="10241280" cy="320040"/>
           </a:xfrm>
           <a:prstGeom prst="rect">
             <a:avLst/>
@@ -4344,15 +4348,15 @@
           <a:lstStyle/>
           <a:p>
             <a:pPr>
-              <a:defRPr sz="1300" b="1">
-                <a:solidFill>
-                  <a:srgbClr val="06B6D4"/>
-                </a:solidFill>
-                <a:latin typeface="Segoe UI"/>
-              </a:defRPr>
-            </a:pPr>
-            <a:r>
-              <a:t>🖥️ User-Mode Client SDK (include/unpd/client.hpp)</a:t>
+              <a:defRPr sz="1100" b="1">
+                <a:solidFill>
+                  <a:srgbClr val="60A5FA"/>
+                </a:solidFill>
+                <a:latin typeface="Calibri"/>
+              </a:defRPr>
+            </a:pPr>
+            <a:r>
+              <a:t>УРОВЕНЬ ПОЛЬЗОВАТЕЛЬСКОГО РЕЖИМА (USER-MODE CLIENT SDK)</a:t>
             </a:r>
           </a:p>
         </p:txBody>
@@ -4365,8 +4369,8 @@
         </p:nvSpPr>
         <p:spPr>
           <a:xfrm>
-            <a:off x="914400" y="1828800"/>
-            <a:ext cx="10332720" cy="822960"/>
+            <a:off x="960120" y="1737360"/>
+            <a:ext cx="10241280" cy="868680"/>
           </a:xfrm>
           <a:prstGeom prst="rect">
             <a:avLst/>
@@ -4382,41 +4386,41 @@
             <a:pPr>
               <a:defRPr sz="1100">
                 <a:solidFill>
-                  <a:srgbClr val="F0F6FC"/>
-                </a:solidFill>
-                <a:latin typeface="Segoe UI"/>
-              </a:defRPr>
-            </a:pPr>
-            <a:r>
-              <a:t>• DriverClient: 16 строго типизированных C++20 методов (read/write CR3, queue APC, clean PiDDB, map memory, slabs, ping)</a:t>
+                  <a:srgbClr val="F8FAFC"/>
+                </a:solidFill>
+                <a:latin typeface="Calibri"/>
+              </a:defRPr>
+            </a:pPr>
+            <a:r>
+              <a:t>• Класс DriverClient: 16 типизированных методов (чтение/запись по CR3, постановка KAPC, очистка PiDDB, выделение MDL, слэб-кэши, пинг)</a:t>
             </a:r>
             <a:br/>
             <a:r>
-              <a:t>• SharedRingSession: Высокоуровневый RAII-контейнер для lockless кольцевого канала с поддержкой Mock Loopback в CI</a:t>
-            </a:r>
-          </a:p>
-        </p:txBody>
-      </p:sp>
-      <p:sp>
-        <p:nvSpPr>
-          <p:cNvPr id="8" name="Rounded Rectangle 7"/>
+              <a:t>• Класс SharedRingSession: Высокоуровневый RAII-контейнер lockless кольцевого канала с поддержкой Mock Loopback для автономного CI</a:t>
+            </a:r>
+          </a:p>
+        </p:txBody>
+      </p:sp>
+      <p:sp>
+        <p:nvSpPr>
+          <p:cNvPr id="8" name="Rectangle 7"/>
           <p:cNvSpPr/>
           <p:nvPr/>
         </p:nvSpPr>
         <p:spPr>
           <a:xfrm>
-            <a:off x="731520" y="3017520"/>
-            <a:ext cx="10698480" cy="1828800"/>
-          </a:xfrm>
-          <a:prstGeom prst="roundRect">
+            <a:off x="731520" y="2926080"/>
+            <a:ext cx="10698480" cy="1920240"/>
+          </a:xfrm>
+          <a:prstGeom prst="rect">
             <a:avLst/>
           </a:prstGeom>
           <a:solidFill>
-            <a:srgbClr val="161B22"/>
+            <a:srgbClr val="1E293B"/>
           </a:solidFill>
-          <a:ln w="15240">
+          <a:ln w="12700">
             <a:solidFill>
-              <a:srgbClr val="10B981"/>
+              <a:srgbClr val="334155"/>
             </a:solidFill>
           </a:ln>
         </p:spPr>
@@ -4450,8 +4454,8 @@
         </p:nvSpPr>
         <p:spPr>
           <a:xfrm>
-            <a:off x="914400" y="3154679"/>
-            <a:ext cx="10332719" cy="365760"/>
+            <a:off x="960120" y="3063240"/>
+            <a:ext cx="10241280" cy="320040"/>
           </a:xfrm>
           <a:prstGeom prst="rect">
             <a:avLst/>
@@ -4465,15 +4469,15 @@
           <a:lstStyle/>
           <a:p>
             <a:pPr>
-              <a:defRPr sz="1300" b="1">
-                <a:solidFill>
-                  <a:srgbClr val="06B6D4"/>
-                </a:solidFill>
-                <a:latin typeface="Segoe UI"/>
-              </a:defRPr>
-            </a:pPr>
-            <a:r>
-              <a:t>⚙️ Ring-0 IRP Dispatch Router &amp; Kernel Core (src/driver/)</a:t>
+              <a:defRPr sz="1100" b="1">
+                <a:solidFill>
+                  <a:srgbClr val="60A5FA"/>
+                </a:solidFill>
+                <a:latin typeface="Calibri"/>
+              </a:defRPr>
+            </a:pPr>
+            <a:r>
+              <a:t>УРОВЕНЬ ЯДРА WINDOWS (RING-0 KERNEL DISPATCH &amp; ENGINES)</a:t>
             </a:r>
           </a:p>
         </p:txBody>
@@ -4486,8 +4490,8 @@
         </p:nvSpPr>
         <p:spPr>
           <a:xfrm>
-            <a:off x="914400" y="3474720"/>
-            <a:ext cx="10332720" cy="1188720"/>
+            <a:off x="960120" y="3383280"/>
+            <a:ext cx="10241280" cy="1280160"/>
           </a:xfrm>
           <a:prstGeom prst="rect">
             <a:avLst/>
@@ -4503,32 +4507,32 @@
             <a:pPr>
               <a:defRPr sz="1100">
                 <a:solidFill>
-                  <a:srgbClr val="F0F6FC"/>
-                </a:solidFill>
-                <a:latin typeface="Segoe UI"/>
-              </a:defRPr>
-            </a:pPr>
-            <a:r>
-              <a:t>• 16 IOCTL Кодов (0x800..0x80F): Полная SEH-изоляция (__try/__except), ProbeForRead/Write, 16MB буферный лимит</a:t>
+                  <a:srgbClr val="F8FAFC"/>
+                </a:solidFill>
+                <a:latin typeface="Calibri"/>
+              </a:defRPr>
+            </a:pPr>
+            <a:r>
+              <a:t>• Диспетчер IRP (16 кодов IOCTL 0x800..0x80F): Полная изоляция в SEH (__try/__except), валидация ProbeForRead/Write, 16MB лимит</a:t>
             </a:r>
             <a:br/>
             <a:r>
-              <a:t>• IMemoryEngine Hierarchy: MdlMemoryEngine (Zero-Copy), SlabMemoryEngine (Lookaside), PoolMemoryEngine (Tracked)</a:t>
+              <a:t>• Полиморфный диспетчер памяти IMemoryEngine: MdlMemoryEngine (Zero-Copy), SlabMemoryEngine (Lookaside), PoolMemoryEngine</a:t>
             </a:r>
             <a:br/>
             <a:r>
-              <a:t>• MMU Paging Engine &amp; Cr3Walker: Прямой 4-уровневый разбор таблиц страниц PML4 -&gt; PDPTE -&gt; PDE -&gt; PTE</a:t>
+              <a:t>• Подсистема MMU Paging &amp; Cr3Walker: Прямой 4-уровневый разбор таблиц страниц PML4 -&gt; PDPTE -&gt; PDE -&gt; PTE без прикрепления</a:t>
             </a:r>
             <a:br/>
             <a:r>
-              <a:t>• KernelApc &amp; StealthCleaners: Асинхронные APC с Rundown-защитой, AVL-ребалансировка PiDDBCacheTable</a:t>
-            </a:r>
-          </a:p>
-        </p:txBody>
-      </p:sp>
-      <p:sp>
-        <p:nvSpPr>
-          <p:cNvPr id="11" name="Rounded Rectangle 10"/>
+              <a:t>• Подсистемы KernelApc и StealthCleaners: Асинхронные APC с Rundown-защитой, AVL-ребалансировка PiDDBCacheTable</a:t>
+            </a:r>
+          </a:p>
+        </p:txBody>
+      </p:sp>
+      <p:sp>
+        <p:nvSpPr>
+          <p:cNvPr id="11" name="Rectangle 10"/>
           <p:cNvSpPr/>
           <p:nvPr/>
         </p:nvSpPr>
@@ -4537,15 +4541,15 @@
             <a:off x="731520" y="5029200"/>
             <a:ext cx="10698480" cy="1280160"/>
           </a:xfrm>
-          <a:prstGeom prst="roundRect">
+          <a:prstGeom prst="rect">
             <a:avLst/>
           </a:prstGeom>
           <a:solidFill>
-            <a:srgbClr val="161B22"/>
+            <a:srgbClr val="1E293B"/>
           </a:solidFill>
-          <a:ln w="15240">
+          <a:ln w="12700">
             <a:solidFill>
-              <a:srgbClr val="A855F7"/>
+              <a:srgbClr val="334155"/>
             </a:solidFill>
           </a:ln>
         </p:spPr>
@@ -4579,8 +4583,8 @@
         </p:nvSpPr>
         <p:spPr>
           <a:xfrm>
-            <a:off x="914400" y="5166360"/>
-            <a:ext cx="10332719" cy="365760"/>
+            <a:off x="960120" y="5166360"/>
+            <a:ext cx="10241280" cy="320040"/>
           </a:xfrm>
           <a:prstGeom prst="rect">
             <a:avLst/>
@@ -4594,15 +4598,15 @@
           <a:lstStyle/>
           <a:p>
             <a:pPr>
-              <a:defRPr sz="1300" b="1">
-                <a:solidFill>
-                  <a:srgbClr val="06B6D4"/>
-                </a:solidFill>
-                <a:latin typeface="Segoe UI"/>
-              </a:defRPr>
-            </a:pPr>
-            <a:r>
-              <a:t>⚡ Hardware Assembly Layer (MASM64 / x86-64)</a:t>
+              <a:defRPr sz="1100" b="1">
+                <a:solidFill>
+                  <a:srgbClr val="60A5FA"/>
+                </a:solidFill>
+                <a:latin typeface="Calibri"/>
+              </a:defRPr>
+            </a:pPr>
+            <a:r>
+              <a:t>АППАРАТНО-ЗАВИСИМЫЙ УРОВЕНЬ (MASM64 / HARDWARE PRIMITIVES)</a:t>
             </a:r>
           </a:p>
         </p:txBody>
@@ -4615,8 +4619,8 @@
         </p:nvSpPr>
         <p:spPr>
           <a:xfrm>
-            <a:off x="914400" y="5486400"/>
-            <a:ext cx="10332720" cy="731520"/>
+            <a:off x="960120" y="5486400"/>
+            <a:ext cx="10241280" cy="685800"/>
           </a:xfrm>
           <a:prstGeom prst="rect">
             <a:avLst/>
@@ -4632,17 +4636,17 @@
             <a:pPr>
               <a:defRPr sz="1100">
                 <a:solidFill>
-                  <a:srgbClr val="F0F6FC"/>
-                </a:solidFill>
-                <a:latin typeface="Segoe UI"/>
-              </a:defRPr>
-            </a:pPr>
-            <a:r>
-              <a:t>• Инвалидация TLB (invlpg, wbinvd, CR3 reload)  |  Аппаратный SSE4.2 CRC32 (crc32 rax, rdx)  |  Барьеры памяти (mfence, lfence, sfence)</a:t>
+                  <a:srgbClr val="F8FAFC"/>
+                </a:solidFill>
+                <a:latin typeface="Calibri"/>
+              </a:defRPr>
+            </a:pPr>
+            <a:r>
+              <a:t>• Инвалидация кэшей TLB (invlpg, wbinvd, перезагрузка CR3)  |  Аппаратный SSE4.2 CRC32 (crc32 rax, rdx)  |  Барьеры памяти (mfence, lfence, sfence)</a:t>
             </a:r>
             <a:br/>
             <a:r>
-              <a:t>• Доступ к управляющим регистрам (CR0..CR8, DR0..DR7, XCR0, IA32_EFER, IDTR, GDTR, TR)</a:t>
+              <a:t>• Прямой доступ к регистрам процессора: CR0..CR8, DR0..DR7, XCR0, IA32_EFER, IDTR, GDTR, TR</a:t>
             </a:r>
           </a:p>
         </p:txBody>
@@ -4680,7 +4684,7 @@
             <a:avLst/>
           </a:prstGeom>
           <a:solidFill>
-            <a:srgbClr val="0D1117"/>
+            <a:srgbClr val="0F172A"/>
           </a:solidFill>
           <a:ln>
             <a:noFill/>
@@ -4717,7 +4721,7 @@
         <p:spPr>
           <a:xfrm>
             <a:off x="731520" y="365760"/>
-            <a:ext cx="10698480" cy="274320"/>
+            <a:ext cx="10698480" cy="228600"/>
           </a:xfrm>
           <a:prstGeom prst="rect">
             <a:avLst/>
@@ -4731,15 +4735,15 @@
           <a:lstStyle/>
           <a:p>
             <a:pPr>
-              <a:defRPr sz="1100" b="1">
-                <a:solidFill>
-                  <a:srgbClr val="10B981"/>
-                </a:solidFill>
-                <a:latin typeface="Segoe UI"/>
-              </a:defRPr>
-            </a:pPr>
-            <a:r>
-              <a:t>UNPD АКАДЕМИЧЕСКАЯ ЗАЩИТА</a:t>
+              <a:defRPr sz="1000" b="1">
+                <a:solidFill>
+                  <a:srgbClr val="2DD4BF"/>
+                </a:solidFill>
+                <a:latin typeface="Calibri"/>
+              </a:defRPr>
+            </a:pPr>
+            <a:r>
+              <a:t>РАЗДЕЛ 3</a:t>
             </a:r>
           </a:p>
         </p:txBody>
@@ -4752,8 +4756,8 @@
         </p:nvSpPr>
         <p:spPr>
           <a:xfrm>
-            <a:off x="731520" y="640080"/>
-            <a:ext cx="10698480" cy="548640"/>
+            <a:off x="731520" y="594360"/>
+            <a:ext cx="10698480" cy="502920"/>
           </a:xfrm>
           <a:prstGeom prst="rect">
             <a:avLst/>
@@ -4767,39 +4771,39 @@
           <a:lstStyle/>
           <a:p>
             <a:pPr>
-              <a:defRPr sz="2200" b="1">
-                <a:solidFill>
-                  <a:srgbClr val="F0F6FC"/>
-                </a:solidFill>
-                <a:latin typeface="Segoe UI"/>
-              </a:defRPr>
-            </a:pPr>
-            <a:r>
-              <a:t>3. Freestanding C++20 Библиотека Ядра (unpd::kstd)</a:t>
-            </a:r>
-          </a:p>
-        </p:txBody>
-      </p:sp>
-      <p:sp>
-        <p:nvSpPr>
-          <p:cNvPr id="5" name="Rounded Rectangle 4"/>
+              <a:defRPr sz="2000" b="1">
+                <a:solidFill>
+                  <a:srgbClr val="F8FAFC"/>
+                </a:solidFill>
+                <a:latin typeface="Calibri"/>
+              </a:defRPr>
+            </a:pPr>
+            <a:r>
+              <a:t>Freestanding библиотека компонентов ядра (unpd::kstd)</a:t>
+            </a:r>
+          </a:p>
+        </p:txBody>
+      </p:sp>
+      <p:sp>
+        <p:nvSpPr>
+          <p:cNvPr id="5" name="Rectangle 4"/>
           <p:cNvSpPr/>
           <p:nvPr/>
         </p:nvSpPr>
         <p:spPr>
           <a:xfrm>
-            <a:off x="731520" y="1371600"/>
-            <a:ext cx="5120640" cy="2286000"/>
-          </a:xfrm>
-          <a:prstGeom prst="roundRect">
+            <a:off x="731520" y="1280160"/>
+            <a:ext cx="5120640" cy="2377440"/>
+          </a:xfrm>
+          <a:prstGeom prst="rect">
             <a:avLst/>
           </a:prstGeom>
           <a:solidFill>
-            <a:srgbClr val="161B22"/>
+            <a:srgbClr val="1E293B"/>
           </a:solidFill>
-          <a:ln w="15240">
+          <a:ln w="12700">
             <a:solidFill>
-              <a:srgbClr val="06B6D4"/>
+              <a:srgbClr val="334155"/>
             </a:solidFill>
           </a:ln>
         </p:spPr>
@@ -4833,8 +4837,8 @@
         </p:nvSpPr>
         <p:spPr>
           <a:xfrm>
-            <a:off x="914400" y="1508760"/>
-            <a:ext cx="4754879" cy="365760"/>
+            <a:off x="960120" y="1417319"/>
+            <a:ext cx="4663440" cy="320040"/>
           </a:xfrm>
           <a:prstGeom prst="rect">
             <a:avLst/>
@@ -4848,15 +4852,15 @@
           <a:lstStyle/>
           <a:p>
             <a:pPr>
-              <a:defRPr sz="1300" b="1">
-                <a:solidFill>
-                  <a:srgbClr val="06B6D4"/>
-                </a:solidFill>
-                <a:latin typeface="Segoe UI"/>
-              </a:defRPr>
-            </a:pPr>
-            <a:r>
-              <a:t>📦 kstd::span&lt;T&gt;</a:t>
+              <a:defRPr sz="1100" b="1">
+                <a:solidFill>
+                  <a:srgbClr val="60A5FA"/>
+                </a:solidFill>
+                <a:latin typeface="Calibri"/>
+              </a:defRPr>
+            </a:pPr>
+            <a:r>
+              <a:t>1. KSTD::SPAN&lt;T&gt; — НЕПРЕРЫВНЫЙ СРЕЗ ПАМЯТИ</a:t>
             </a:r>
           </a:p>
         </p:txBody>
@@ -4869,8 +4873,8 @@
         </p:nvSpPr>
         <p:spPr>
           <a:xfrm>
-            <a:off x="914400" y="1828800"/>
-            <a:ext cx="4754880" cy="1645920"/>
+            <a:off x="960120" y="1737360"/>
+            <a:ext cx="4663440" cy="1737360"/>
           </a:xfrm>
           <a:prstGeom prst="rect">
             <a:avLst/>
@@ -4886,48 +4890,48 @@
             <a:pPr>
               <a:defRPr sz="1050">
                 <a:solidFill>
-                  <a:srgbClr val="F0F6FC"/>
-                </a:solidFill>
-              </a:defRPr>
-            </a:pPr>
-            <a:r>
-              <a:t>• Непрерывное представление среза памяти без владения</a:t>
+                  <a:srgbClr val="F8FAFC"/>
+                </a:solidFill>
+              </a:defRPr>
+            </a:pPr>
+            <a:r>
+              <a:t>• Легковесный срез непрерывной памяти без владения и без CRT</a:t>
             </a:r>
             <a:br/>
             <a:r>
-              <a:t>• Полный набор итераторов (begin, end, rbegin, rend)</a:t>
+              <a:t>• Полная поддержка итераторов (begin, end, rbegin, rend)</a:t>
             </a:r>
             <a:br/>
             <a:r>
-              <a:t>• Безопасное разделение (subspan, first, last) с проверкой границ</a:t>
+              <a:t>• Методы безопасного деления (subspan, first, last) с проверкой границ</a:t>
             </a:r>
             <a:br/>
             <a:r>
-              <a:t>• Полная совместимость с буферами ядра и MDL</a:t>
-            </a:r>
-          </a:p>
-        </p:txBody>
-      </p:sp>
-      <p:sp>
-        <p:nvSpPr>
-          <p:cNvPr id="8" name="Rounded Rectangle 7"/>
+              <a:t>• Полная совместимость с ядерными буферами MDL и пулом</a:t>
+            </a:r>
+          </a:p>
+        </p:txBody>
+      </p:sp>
+      <p:sp>
+        <p:nvSpPr>
+          <p:cNvPr id="8" name="Rectangle 7"/>
           <p:cNvSpPr/>
           <p:nvPr/>
         </p:nvSpPr>
         <p:spPr>
           <a:xfrm>
-            <a:off x="6217920" y="1371600"/>
-            <a:ext cx="5212080" cy="2286000"/>
-          </a:xfrm>
-          <a:prstGeom prst="roundRect">
+            <a:off x="6217920" y="1280160"/>
+            <a:ext cx="5212080" cy="2377440"/>
+          </a:xfrm>
+          <a:prstGeom prst="rect">
             <a:avLst/>
           </a:prstGeom>
           <a:solidFill>
-            <a:srgbClr val="161B22"/>
+            <a:srgbClr val="1E293B"/>
           </a:solidFill>
-          <a:ln w="15240">
+          <a:ln w="12700">
             <a:solidFill>
-              <a:srgbClr val="10B981"/>
+              <a:srgbClr val="334155"/>
             </a:solidFill>
           </a:ln>
         </p:spPr>
@@ -4961,8 +4965,8 @@
         </p:nvSpPr>
         <p:spPr>
           <a:xfrm>
-            <a:off x="6400800" y="1508760"/>
-            <a:ext cx="4846320" cy="365760"/>
+            <a:off x="6446520" y="1417319"/>
+            <a:ext cx="4754880" cy="320040"/>
           </a:xfrm>
           <a:prstGeom prst="rect">
             <a:avLst/>
@@ -4976,15 +4980,15 @@
           <a:lstStyle/>
           <a:p>
             <a:pPr>
-              <a:defRPr sz="1300" b="1">
-                <a:solidFill>
-                  <a:srgbClr val="06B6D4"/>
-                </a:solidFill>
-                <a:latin typeface="Segoe UI"/>
-              </a:defRPr>
-            </a:pPr>
-            <a:r>
-              <a:t>🛡️ kstd::expected&lt;T, NTSTATUS&gt;</a:t>
+              <a:defRPr sz="1100" b="1">
+                <a:solidFill>
+                  <a:srgbClr val="60A5FA"/>
+                </a:solidFill>
+                <a:latin typeface="Calibri"/>
+              </a:defRPr>
+            </a:pPr>
+            <a:r>
+              <a:t>2. KSTD::EXPECTED&lt;T, NTSTATUS&gt; — МОНАДА ОШИБОК</a:t>
             </a:r>
           </a:p>
         </p:txBody>
@@ -4997,8 +5001,8 @@
         </p:nvSpPr>
         <p:spPr>
           <a:xfrm>
-            <a:off x="6400800" y="1828800"/>
-            <a:ext cx="4846320" cy="1645920"/>
+            <a:off x="6446520" y="1737360"/>
+            <a:ext cx="4754880" cy="1737360"/>
           </a:xfrm>
           <a:prstGeom prst="rect">
             <a:avLst/>
@@ -5014,16 +5018,16 @@
             <a:pPr>
               <a:defRPr sz="1050">
                 <a:solidFill>
-                  <a:srgbClr val="F0F6FC"/>
-                </a:solidFill>
-              </a:defRPr>
-            </a:pPr>
-            <a:r>
-              <a:t>• Монадический контейнер значения или статуса ошибки</a:t>
+                  <a:srgbClr val="F8FAFC"/>
+                </a:solidFill>
+              </a:defRPr>
+            </a:pPr>
+            <a:r>
+              <a:t>• Монадический контейнер значения или кода статуса NTSTATUS</a:t>
             </a:r>
             <a:br/>
             <a:r>
-              <a:t>• Заменяет механизм C++ исключений, запрещенный в Ring-0</a:t>
+              <a:t>• Полная замена механизма C++ исключений, запрещенного в Ring-0</a:t>
             </a:r>
             <a:br/>
             <a:r>
@@ -5031,31 +5035,31 @@
             </a:r>
             <a:br/>
             <a:r>
-              <a:t>• Специализация kstd::expected&lt;void, E&gt; для процедур</a:t>
-            </a:r>
-          </a:p>
-        </p:txBody>
-      </p:sp>
-      <p:sp>
-        <p:nvSpPr>
-          <p:cNvPr id="11" name="Rounded Rectangle 10"/>
+              <a:t>• Специализация kstd::expected&lt;void, E&gt; для статусных процедур</a:t>
+            </a:r>
+          </a:p>
+        </p:txBody>
+      </p:sp>
+      <p:sp>
+        <p:nvSpPr>
+          <p:cNvPr id="11" name="Rectangle 10"/>
           <p:cNvSpPr/>
           <p:nvPr/>
         </p:nvSpPr>
         <p:spPr>
           <a:xfrm>
-            <a:off x="731520" y="3931920"/>
-            <a:ext cx="5120640" cy="2286000"/>
-          </a:xfrm>
-          <a:prstGeom prst="roundRect">
+            <a:off x="731520" y="3840480"/>
+            <a:ext cx="5120640" cy="2377440"/>
+          </a:xfrm>
+          <a:prstGeom prst="rect">
             <a:avLst/>
           </a:prstGeom>
           <a:solidFill>
-            <a:srgbClr val="161B22"/>
+            <a:srgbClr val="1E293B"/>
           </a:solidFill>
-          <a:ln w="15240">
+          <a:ln w="12700">
             <a:solidFill>
-              <a:srgbClr val="A855F7"/>
+              <a:srgbClr val="334155"/>
             </a:solidFill>
           </a:ln>
         </p:spPr>
@@ -5089,8 +5093,8 @@
         </p:nvSpPr>
         <p:spPr>
           <a:xfrm>
-            <a:off x="914400" y="4069080"/>
-            <a:ext cx="4754879" cy="365760"/>
+            <a:off x="960120" y="3977640"/>
+            <a:ext cx="4663440" cy="320040"/>
           </a:xfrm>
           <a:prstGeom prst="rect">
             <a:avLst/>
@@ -5104,15 +5108,15 @@
           <a:lstStyle/>
           <a:p>
             <a:pPr>
-              <a:defRPr sz="1300" b="1">
-                <a:solidFill>
-                  <a:srgbClr val="06B6D4"/>
-                </a:solidFill>
-                <a:latin typeface="Segoe UI"/>
-              </a:defRPr>
-            </a:pPr>
-            <a:r>
-              <a:t>💎 kstd::unique_ptr&lt;T, Tag&gt;</a:t>
+              <a:defRPr sz="1100" b="1">
+                <a:solidFill>
+                  <a:srgbClr val="60A5FA"/>
+                </a:solidFill>
+                <a:latin typeface="Calibri"/>
+              </a:defRPr>
+            </a:pPr>
+            <a:r>
+              <a:t>3. KSTD::UNIQUE_PTR&lt;T, TAG&gt; — RAII ПУЛА ЯДРА</a:t>
             </a:r>
           </a:p>
         </p:txBody>
@@ -5125,8 +5129,8 @@
         </p:nvSpPr>
         <p:spPr>
           <a:xfrm>
-            <a:off x="914400" y="4389120"/>
-            <a:ext cx="4754880" cy="1645920"/>
+            <a:off x="960120" y="4297680"/>
+            <a:ext cx="4663440" cy="1737360"/>
           </a:xfrm>
           <a:prstGeom prst="rect">
             <a:avLst/>
@@ -5142,48 +5146,48 @@
             <a:pPr>
               <a:defRPr sz="1050">
                 <a:solidFill>
-                  <a:srgbClr val="F0F6FC"/>
-                </a:solidFill>
-              </a:defRPr>
-            </a:pPr>
-            <a:r>
-              <a:t>• Умный указатель с автоматическим освобождением пула</a:t>
+                  <a:srgbClr val="F8FAFC"/>
+                </a:solidFill>
+              </a:defRPr>
+            </a:pPr>
+            <a:r>
+              <a:t>• Инкапсулирует владение динамическим блоком невыгружаемого пула</a:t>
             </a:r>
             <a:br/>
             <a:r>
-              <a:t>• Вызов ExFreePoolWithTag при выходе из области видимости</a:t>
+              <a:t>• Автоматический вызов ExFreePoolWithTag при выходе из скоупа</a:t>
             </a:r>
             <a:br/>
             <a:r>
-              <a:t>• Запрет копирования, полная поддержка перемещения (Move-only)</a:t>
+              <a:t>• Семантика чистого перемещения (Move-only), запрет копирования</a:t>
             </a:r>
             <a:br/>
             <a:r>
-              <a:t>• Исключает утечки невыгружаемого пула при ранних возвратах</a:t>
-            </a:r>
-          </a:p>
-        </p:txBody>
-      </p:sp>
-      <p:sp>
-        <p:nvSpPr>
-          <p:cNvPr id="14" name="Rounded Rectangle 13"/>
+              <a:t>• Исключает утечки пула при ранних возвратах из функций</a:t>
+            </a:r>
+          </a:p>
+        </p:txBody>
+      </p:sp>
+      <p:sp>
+        <p:nvSpPr>
+          <p:cNvPr id="14" name="Rectangle 13"/>
           <p:cNvSpPr/>
           <p:nvPr/>
         </p:nvSpPr>
         <p:spPr>
           <a:xfrm>
-            <a:off x="6217920" y="3931920"/>
-            <a:ext cx="5212080" cy="2286000"/>
-          </a:xfrm>
-          <a:prstGeom prst="roundRect">
+            <a:off x="6217920" y="3840480"/>
+            <a:ext cx="5212080" cy="2377440"/>
+          </a:xfrm>
+          <a:prstGeom prst="rect">
             <a:avLst/>
           </a:prstGeom>
           <a:solidFill>
-            <a:srgbClr val="161B22"/>
+            <a:srgbClr val="1E293B"/>
           </a:solidFill>
-          <a:ln w="15240">
+          <a:ln w="12700">
             <a:solidFill>
-              <a:srgbClr val="3B82F6"/>
+              <a:srgbClr val="334155"/>
             </a:solidFill>
           </a:ln>
         </p:spPr>
@@ -5217,8 +5221,8 @@
         </p:nvSpPr>
         <p:spPr>
           <a:xfrm>
-            <a:off x="6400800" y="4069080"/>
-            <a:ext cx="4846320" cy="365760"/>
+            <a:off x="6446520" y="3977640"/>
+            <a:ext cx="4754880" cy="320040"/>
           </a:xfrm>
           <a:prstGeom prst="rect">
             <a:avLst/>
@@ -5232,15 +5236,15 @@
           <a:lstStyle/>
           <a:p>
             <a:pPr>
-              <a:defRPr sz="1300" b="1">
-                <a:solidFill>
-                  <a:srgbClr val="06B6D4"/>
-                </a:solidFill>
-                <a:latin typeface="Segoe UI"/>
-              </a:defRPr>
-            </a:pPr>
-            <a:r>
-              <a:t>🧩 C++20 Concepts (Концепты времени компиляции)</a:t>
+              <a:defRPr sz="1100" b="1">
+                <a:solidFill>
+                  <a:srgbClr val="60A5FA"/>
+                </a:solidFill>
+                <a:latin typeface="Calibri"/>
+              </a:defRPr>
+            </a:pPr>
+            <a:r>
+              <a:t>4. КОНЦЕПТЫ ВРЕМЕНИ КОМПИЛЯЦИИ (C++20 CONCEPTS)</a:t>
             </a:r>
           </a:p>
         </p:txBody>
@@ -5253,8 +5257,8 @@
         </p:nvSpPr>
         <p:spPr>
           <a:xfrm>
-            <a:off x="6400800" y="4389120"/>
-            <a:ext cx="4846320" cy="1645920"/>
+            <a:off x="6446520" y="4297680"/>
+            <a:ext cx="4754880" cy="1737360"/>
           </a:xfrm>
           <a:prstGeom prst="rect">
             <a:avLst/>
@@ -5270,28 +5274,28 @@
             <a:pPr>
               <a:defRPr sz="1050">
                 <a:solidFill>
-                  <a:srgbClr val="F0F6FC"/>
-                </a:solidFill>
-              </a:defRPr>
-            </a:pPr>
-            <a:r>
-              <a:t>• integral&lt;T&gt;: Ограничение целочисленных аргументов</a:t>
+                  <a:srgbClr val="F8FAFC"/>
+                </a:solidFill>
+              </a:defRPr>
+            </a:pPr>
+            <a:r>
+              <a:t>• integral&lt;T&gt;: Ограничение шаблонных целочисленных аргументов</a:t>
             </a:r>
             <a:br/>
             <a:r>
-              <a:t>• pointer&lt;T&gt;: Проверка указательных типов</a:t>
+              <a:t>• pointer&lt;T&gt;: Статическая валидация указательных типов данных</a:t>
             </a:r>
             <a:br/>
             <a:r>
-              <a:t>• same_as&lt;T, U&gt;: Строгая эквивалентность типов</a:t>
+              <a:t>• same_as&lt;T, U&gt;: Строгая эквивалентность типов в шаблонах</a:t>
             </a:r>
             <a:br/>
             <a:r>
-              <a:t>• trivially_copyable&lt;T&gt;: Безопасность memcpy в драйвере</a:t>
+              <a:t>• trivially_copyable&lt;T&gt;: Гарантия безопасности memcpy для структур</a:t>
             </a:r>
             <a:br/>
             <a:r>
-              <a:t>• invocable&lt;F, Args...&gt;: Проверка сигнатур callback-функций</a:t>
+              <a:t>• invocable&lt;F, Args...&gt;: Проверка сигнатур callback-функций ядра</a:t>
             </a:r>
           </a:p>
         </p:txBody>
@@ -5329,7 +5333,7 @@
             <a:avLst/>
           </a:prstGeom>
           <a:solidFill>
-            <a:srgbClr val="0D1117"/>
+            <a:srgbClr val="0F172A"/>
           </a:solidFill>
           <a:ln>
             <a:noFill/>
@@ -5366,7 +5370,7 @@
         <p:spPr>
           <a:xfrm>
             <a:off x="731520" y="365760"/>
-            <a:ext cx="10698480" cy="274320"/>
+            <a:ext cx="10698480" cy="228600"/>
           </a:xfrm>
           <a:prstGeom prst="rect">
             <a:avLst/>
@@ -5380,15 +5384,15 @@
           <a:lstStyle/>
           <a:p>
             <a:pPr>
-              <a:defRPr sz="1100" b="1">
-                <a:solidFill>
-                  <a:srgbClr val="10B981"/>
-                </a:solidFill>
-                <a:latin typeface="Segoe UI"/>
-              </a:defRPr>
-            </a:pPr>
-            <a:r>
-              <a:t>UNPD АКАДЕМИЧЕСКАЯ ЗАЩИТА</a:t>
+              <a:defRPr sz="1000" b="1">
+                <a:solidFill>
+                  <a:srgbClr val="2DD4BF"/>
+                </a:solidFill>
+                <a:latin typeface="Calibri"/>
+              </a:defRPr>
+            </a:pPr>
+            <a:r>
+              <a:t>РАЗДЕЛ 4</a:t>
             </a:r>
           </a:p>
         </p:txBody>
@@ -5401,8 +5405,8 @@
         </p:nvSpPr>
         <p:spPr>
           <a:xfrm>
-            <a:off x="731520" y="640080"/>
-            <a:ext cx="10698480" cy="548640"/>
+            <a:off x="731520" y="594360"/>
+            <a:ext cx="10698480" cy="502920"/>
           </a:xfrm>
           <a:prstGeom prst="rect">
             <a:avLst/>
@@ -5416,39 +5420,39 @@
           <a:lstStyle/>
           <a:p>
             <a:pPr>
-              <a:defRPr sz="2200" b="1">
-                <a:solidFill>
-                  <a:srgbClr val="F0F6FC"/>
-                </a:solidFill>
-                <a:latin typeface="Segoe UI"/>
-              </a:defRPr>
-            </a:pPr>
-            <a:r>
-              <a:t>4. 4-Уровневый Разбор MMU x86-64 и CR3 Walker</a:t>
-            </a:r>
-          </a:p>
-        </p:txBody>
-      </p:sp>
-      <p:sp>
-        <p:nvSpPr>
-          <p:cNvPr id="5" name="Rounded Rectangle 4"/>
+              <a:defRPr sz="2000" b="1">
+                <a:solidFill>
+                  <a:srgbClr val="F8FAFC"/>
+                </a:solidFill>
+                <a:latin typeface="Calibri"/>
+              </a:defRPr>
+            </a:pPr>
+            <a:r>
+              <a:t>Математическая модель трансляции MMU x86-64 и CR3 Walker</a:t>
+            </a:r>
+          </a:p>
+        </p:txBody>
+      </p:sp>
+      <p:sp>
+        <p:nvSpPr>
+          <p:cNvPr id="5" name="Rectangle 4"/>
           <p:cNvSpPr/>
           <p:nvPr/>
         </p:nvSpPr>
         <p:spPr>
           <a:xfrm>
-            <a:off x="731520" y="1371600"/>
-            <a:ext cx="10698480" cy="4846320"/>
-          </a:xfrm>
-          <a:prstGeom prst="roundRect">
+            <a:off x="731520" y="1280160"/>
+            <a:ext cx="10698480" cy="4937760"/>
+          </a:xfrm>
+          <a:prstGeom prst="rect">
             <a:avLst/>
           </a:prstGeom>
           <a:solidFill>
-            <a:srgbClr val="161B22"/>
+            <a:srgbClr val="1E293B"/>
           </a:solidFill>
-          <a:ln w="15240">
+          <a:ln w="12700">
             <a:solidFill>
-              <a:srgbClr val="06B6D4"/>
+              <a:srgbClr val="334155"/>
             </a:solidFill>
           </a:ln>
         </p:spPr>
@@ -5482,8 +5486,8 @@
         </p:nvSpPr>
         <p:spPr>
           <a:xfrm>
-            <a:off x="914400" y="1508760"/>
-            <a:ext cx="10332719" cy="365760"/>
+            <a:off x="960120" y="1417319"/>
+            <a:ext cx="10241280" cy="320040"/>
           </a:xfrm>
           <a:prstGeom prst="rect">
             <a:avLst/>
@@ -5497,15 +5501,15 @@
           <a:lstStyle/>
           <a:p>
             <a:pPr>
-              <a:defRPr sz="1300" b="1">
-                <a:solidFill>
-                  <a:srgbClr val="06B6D4"/>
-                </a:solidFill>
-                <a:latin typeface="Segoe UI"/>
-              </a:defRPr>
-            </a:pPr>
-            <a:r>
-              <a:t>📐 Спецификация трансляции виртуального адреса (48-bit Canonical)</a:t>
+              <a:defRPr sz="1100" b="1">
+                <a:solidFill>
+                  <a:srgbClr val="60A5FA"/>
+                </a:solidFill>
+                <a:latin typeface="Calibri"/>
+              </a:defRPr>
+            </a:pPr>
+            <a:r>
+              <a:t>СПЕЦИФИКАЦИЯ 4-УРОВНЕВОЙ ТРАНСЛЯЦИИ КАНОНИЧЕСКОГО АДРЕСА</a:t>
             </a:r>
           </a:p>
         </p:txBody>
@@ -5518,8 +5522,8 @@
         </p:nvSpPr>
         <p:spPr>
           <a:xfrm>
-            <a:off x="914400" y="1828800"/>
-            <a:ext cx="10332720" cy="4206240"/>
+            <a:off x="960120" y="1783080"/>
+            <a:ext cx="10241280" cy="4297680"/>
           </a:xfrm>
           <a:prstGeom prst="rect">
             <a:avLst/>
@@ -5538,13 +5542,13 @@
               </a:spcAft>
               <a:defRPr sz="1200" b="1">
                 <a:solidFill>
-                  <a:srgbClr val="10B981"/>
-                </a:solidFill>
-                <a:latin typeface="Segoe UI"/>
-              </a:defRPr>
-            </a:pPr>
-            <a:r>
-              <a:t>Иерархия трансляции: PML4E [47:39] ➔ PDPTE [38:30] ➔ PDE [29:21] ➔ PTE [20:12] ➔ Page Offset [11:0]</a:t>
+                  <a:srgbClr val="2DD4BF"/>
+                </a:solidFill>
+                <a:latin typeface="Calibri"/>
+              </a:defRPr>
+            </a:pPr>
+            <a:r>
+              <a:t>Схема адресации: PML4E [47:39] -&gt; PDPTE [38:30] -&gt; PDE [29:21] -&gt; PTE [20:12] -&gt; Offset [11:0]</a:t>
             </a:r>
           </a:p>
           <a:p>
@@ -5554,9 +5558,9 @@
               </a:spcAft>
               <a:defRPr sz="1050" b="1">
                 <a:solidFill>
-                  <a:srgbClr val="F0F6FC"/>
-                </a:solidFill>
-                <a:latin typeface="Segoe UI"/>
+                  <a:srgbClr val="F8FAFC"/>
+                </a:solidFill>
+                <a:latin typeface="Calibri"/>
               </a:defRPr>
             </a:pPr>
             <a:r>
@@ -5568,7 +5572,7 @@
                   <a:srgbClr val="94A3B8"/>
                 </a:solidFill>
               </a:rPr>
-              <a:t>Верификация знакового расширения 48-го бита на биты [48..63]. Предотвращает немедленный аппаратный сбой #GP при некорректных адресах.</a:t>
+              <a:t>Верификация знакового расширения 48-го бита на старшие 16 бит. Предотвращает немедленный аппаратный сбой #GP (General Protection Fault) при обработке невалидных адресов.</a:t>
             </a:r>
           </a:p>
           <a:p>
@@ -5578,13 +5582,13 @@
               </a:spcAft>
               <a:defRPr sz="1050" b="1">
                 <a:solidFill>
-                  <a:srgbClr val="F0F6FC"/>
-                </a:solidFill>
-                <a:latin typeface="Segoe UI"/>
-              </a:defRPr>
-            </a:pPr>
-            <a:r>
-              <a:t>• 1GB Huge Pages (PDPTE.LargePage = 1): </a:t>
+                  <a:srgbClr val="F8FAFC"/>
+                </a:solidFill>
+                <a:latin typeface="Calibri"/>
+              </a:defRPr>
+            </a:pPr>
+            <a:r>
+              <a:t>• Трансляция 1GB Huge Pages (PDPTE.LargePage = 1): </a:t>
             </a:r>
             <a:r>
               <a:rPr b="0">
@@ -5592,7 +5596,7 @@
                   <a:srgbClr val="94A3B8"/>
                 </a:solidFill>
               </a:rPr>
-              <a:t>Физический адрес = (PDPTE &amp; 0x000FFFFFC0000000) | (VA &amp; 0x3FFFFFFF). Мгновенная трансляция без прохода уровней PDE/PTE.</a:t>
+              <a:t>Физический адрес = (PDPTE &amp; 0x000FFFFFC0000000) | (VA &amp; 0x3FFFFFFF). Мгновенный расчет физического смещения без обхода нижележащих уровней PDE и PTE.</a:t>
             </a:r>
           </a:p>
           <a:p>
@@ -5602,13 +5606,13 @@
               </a:spcAft>
               <a:defRPr sz="1050" b="1">
                 <a:solidFill>
-                  <a:srgbClr val="F0F6FC"/>
-                </a:solidFill>
-                <a:latin typeface="Segoe UI"/>
-              </a:defRPr>
-            </a:pPr>
-            <a:r>
-              <a:t>• 2MB Large Pages (PDE.LargePage = 1): </a:t>
+                  <a:srgbClr val="F8FAFC"/>
+                </a:solidFill>
+                <a:latin typeface="Calibri"/>
+              </a:defRPr>
+            </a:pPr>
+            <a:r>
+              <a:t>• Трансляция 2MB Large Pages (PDE.LargePage = 1): </a:t>
             </a:r>
             <a:r>
               <a:rPr b="0">
@@ -5626,13 +5630,13 @@
               </a:spcAft>
               <a:defRPr sz="1050" b="1">
                 <a:solidFill>
-                  <a:srgbClr val="F0F6FC"/>
-                </a:solidFill>
-                <a:latin typeface="Segoe UI"/>
-              </a:defRPr>
-            </a:pPr>
-            <a:r>
-              <a:t>• 4KB Small Pages (Стандартный PTE): </a:t>
+                  <a:srgbClr val="F8FAFC"/>
+                </a:solidFill>
+                <a:latin typeface="Calibri"/>
+              </a:defRPr>
+            </a:pPr>
+            <a:r>
+              <a:t>• Трансляция 4KB Standard Pages (PTE): </a:t>
             </a:r>
             <a:r>
               <a:rPr b="0">
@@ -5650,13 +5654,13 @@
               </a:spcAft>
               <a:defRPr sz="1050" b="1">
                 <a:solidFill>
-                  <a:srgbClr val="F0F6FC"/>
-                </a:solidFill>
-                <a:latin typeface="Segoe UI"/>
-              </a:defRPr>
-            </a:pPr>
-            <a:r>
-              <a:t>• Page-Boundary Clamping (Чанкинг границ): </a:t>
+                  <a:srgbClr val="F8FAFC"/>
+                </a:solidFill>
+                <a:latin typeface="Calibri"/>
+              </a:defRPr>
+            </a:pPr>
+            <a:r>
+              <a:t>• Алгоритм Page-Boundary Clamping (Чанкинг границ): </a:t>
             </a:r>
             <a:r>
               <a:rPr b="0">
@@ -5664,7 +5668,7 @@
                   <a:srgbClr val="94A3B8"/>
                 </a:solidFill>
               </a:rPr>
-              <a:t>Размер копируемого фрагмента строго ограничен границей текущей 4KB страницы: chunk = min(remaining, 4096 - (VA &amp; 0xFFF)). Полностью исключает выход за пределы страницы в невыделенную физическую память.</a:t>
+              <a:t>Размер копируемого фрагмента строго ограничен границей текущей 4KB страницы: chunk = min(remaining, 4096 - (VA &amp; 0xFFF)). Полностью исключает выход за пределы страницы в невыделенные физические фреймы.</a:t>
             </a:r>
           </a:p>
           <a:p>
@@ -5674,13 +5678,13 @@
               </a:spcAft>
               <a:defRPr sz="1050" b="1">
                 <a:solidFill>
-                  <a:srgbClr val="F0F6FC"/>
-                </a:solidFill>
-                <a:latin typeface="Segoe UI"/>
-              </a:defRPr>
-            </a:pPr>
-            <a:r>
-              <a:t>• RAII PhysicalMemoryMapping&lt;T&gt;: </a:t>
+                  <a:srgbClr val="F8FAFC"/>
+                </a:solidFill>
+                <a:latin typeface="Calibri"/>
+              </a:defRPr>
+            </a:pPr>
+            <a:r>
+              <a:t>• RAII-обертка PhysicalMemoryMapping&lt;T&gt;: </a:t>
             </a:r>
             <a:r>
               <a:rPr b="0">
@@ -5688,7 +5692,7 @@
                   <a:srgbClr val="94A3B8"/>
                 </a:solidFill>
               </a:rPr>
-              <a:t>Инкапсулирует MmMapIoSpace/MmUnmapIoSpace с гарантированным освобождением маппинга при выходе из скоупа.</a:t>
+              <a:t>Инкапсулирует пары системных вызовов MmMapIoSpace и MmUnmapIoSpace с гарантированным освобождением маппинга при любых путях выхода из функции.</a:t>
             </a:r>
           </a:p>
         </p:txBody>
@@ -5726,7 +5730,7 @@
             <a:avLst/>
           </a:prstGeom>
           <a:solidFill>
-            <a:srgbClr val="0D1117"/>
+            <a:srgbClr val="0F172A"/>
           </a:solidFill>
           <a:ln>
             <a:noFill/>
@@ -5763,7 +5767,7 @@
         <p:spPr>
           <a:xfrm>
             <a:off x="731520" y="365760"/>
-            <a:ext cx="10698480" cy="274320"/>
+            <a:ext cx="10698480" cy="228600"/>
           </a:xfrm>
           <a:prstGeom prst="rect">
             <a:avLst/>
@@ -5777,15 +5781,15 @@
           <a:lstStyle/>
           <a:p>
             <a:pPr>
-              <a:defRPr sz="1100" b="1">
-                <a:solidFill>
-                  <a:srgbClr val="10B981"/>
-                </a:solidFill>
-                <a:latin typeface="Segoe UI"/>
-              </a:defRPr>
-            </a:pPr>
-            <a:r>
-              <a:t>UNPD АКАДЕМИЧЕСКАЯ ЗАЩИТА</a:t>
+              <a:defRPr sz="1000" b="1">
+                <a:solidFill>
+                  <a:srgbClr val="2DD4BF"/>
+                </a:solidFill>
+                <a:latin typeface="Calibri"/>
+              </a:defRPr>
+            </a:pPr>
+            <a:r>
+              <a:t>РАЗДЕЛ 5</a:t>
             </a:r>
           </a:p>
         </p:txBody>
@@ -5798,8 +5802,8 @@
         </p:nvSpPr>
         <p:spPr>
           <a:xfrm>
-            <a:off x="731520" y="640080"/>
-            <a:ext cx="10698480" cy="548640"/>
+            <a:off x="731520" y="594360"/>
+            <a:ext cx="10698480" cy="502920"/>
           </a:xfrm>
           <a:prstGeom prst="rect">
             <a:avLst/>
@@ -5813,39 +5817,39 @@
           <a:lstStyle/>
           <a:p>
             <a:pPr>
-              <a:defRPr sz="2200" b="1">
-                <a:solidFill>
-                  <a:srgbClr val="F0F6FC"/>
-                </a:solidFill>
-                <a:latin typeface="Segoe UI"/>
-              </a:defRPr>
-            </a:pPr>
-            <a:r>
-              <a:t>5. Lockless Shared Memory Channel &amp; Double Buffering</a:t>
-            </a:r>
-          </a:p>
-        </p:txBody>
-      </p:sp>
-      <p:sp>
-        <p:nvSpPr>
-          <p:cNvPr id="5" name="Rounded Rectangle 4"/>
+              <a:defRPr sz="2000" b="1">
+                <a:solidFill>
+                  <a:srgbClr val="F8FAFC"/>
+                </a:solidFill>
+                <a:latin typeface="Calibri"/>
+              </a:defRPr>
+            </a:pPr>
+            <a:r>
+              <a:t>Кольцевой канал разделяемой памяти и двойная буферизация</a:t>
+            </a:r>
+          </a:p>
+        </p:txBody>
+      </p:sp>
+      <p:sp>
+        <p:nvSpPr>
+          <p:cNvPr id="5" name="Rectangle 4"/>
           <p:cNvSpPr/>
           <p:nvPr/>
         </p:nvSpPr>
         <p:spPr>
           <a:xfrm>
-            <a:off x="731520" y="1371600"/>
-            <a:ext cx="5120640" cy="4846320"/>
-          </a:xfrm>
-          <a:prstGeom prst="roundRect">
+            <a:off x="731520" y="1280160"/>
+            <a:ext cx="5120640" cy="4937760"/>
+          </a:xfrm>
+          <a:prstGeom prst="rect">
             <a:avLst/>
           </a:prstGeom>
           <a:solidFill>
-            <a:srgbClr val="161B22"/>
+            <a:srgbClr val="1E293B"/>
           </a:solidFill>
-          <a:ln w="15240">
+          <a:ln w="12700">
             <a:solidFill>
-              <a:srgbClr val="3B82F6"/>
+              <a:srgbClr val="334155"/>
             </a:solidFill>
           </a:ln>
         </p:spPr>
@@ -5879,8 +5883,8 @@
         </p:nvSpPr>
         <p:spPr>
           <a:xfrm>
-            <a:off x="914400" y="1508760"/>
-            <a:ext cx="4754879" cy="365760"/>
+            <a:off x="960120" y="1417319"/>
+            <a:ext cx="4663440" cy="320040"/>
           </a:xfrm>
           <a:prstGeom prst="rect">
             <a:avLst/>
@@ -5894,15 +5898,15 @@
           <a:lstStyle/>
           <a:p>
             <a:pPr>
-              <a:defRPr sz="1300" b="1">
-                <a:solidFill>
-                  <a:srgbClr val="06B6D4"/>
-                </a:solidFill>
-                <a:latin typeface="Segoe UI"/>
-              </a:defRPr>
-            </a:pPr>
-            <a:r>
-              <a:t>⚡ Структура кольца и кэш-линии</a:t>
+              <a:defRPr sz="1100" b="1">
+                <a:solidFill>
+                  <a:srgbClr val="60A5FA"/>
+                </a:solidFill>
+                <a:latin typeface="Calibri"/>
+              </a:defRPr>
+            </a:pPr>
+            <a:r>
+              <a:t>АРХИТЕКТУРА КОЛЬЦЕВОГО БУФЕРА И КЭШ-ЛИНИЙ</a:t>
             </a:r>
           </a:p>
         </p:txBody>
@@ -5915,8 +5919,8 @@
         </p:nvSpPr>
         <p:spPr>
           <a:xfrm>
-            <a:off x="914400" y="1828800"/>
-            <a:ext cx="4754880" cy="4114800"/>
+            <a:off x="960120" y="1783080"/>
+            <a:ext cx="4663440" cy="4206240"/>
           </a:xfrm>
           <a:prstGeom prst="rect">
             <a:avLst/>
@@ -5932,33 +5936,33 @@
             <a:pPr>
               <a:defRPr sz="1050">
                 <a:solidFill>
-                  <a:srgbClr val="F0F6FC"/>
-                </a:solidFill>
-              </a:defRPr>
-            </a:pPr>
-            <a:r>
-              <a:t>• alignas(64) Разделение:</a:t>
+                  <a:srgbClr val="F8FAFC"/>
+                </a:solidFill>
+              </a:defRPr>
+            </a:pPr>
+            <a:r>
+              <a:t>• Разделение кэш-линий alignas(64):</a:t>
             </a:r>
             <a:br/>
             <a:r>
-              <a:t>  Указатели RequestHead/RequestTail и ResponseHead/ResponseTail разнесены по разным 64-байтовым кэш-линиям процессора, исключая эффект False Sharing между ядрами.</a:t>
+              <a:t>  Указатели RequestHead/Tail и ResponseHead/Tail изолированы по независимым 64-байтовым кэш-линиям, что полностью устраняет деградацию производительности от ложного разделения (False Sharing) между ядрами CPU.</a:t>
             </a:r>
             <a:br/>
             <a:br/>
             <a:r>
-              <a:t>• Аппаратные барьеры памяти:</a:t>
+              <a:t>• Аппаратные барьеры сериализации памяти:</a:t>
             </a:r>
             <a:br/>
             <a:r>
-              <a:t>  - Чтение: UnpdLoadFence (_mm_lfence)</a:t>
+              <a:t>  - Барьер загрузки: UnpdLoadFence (_mm_lfence)</a:t>
             </a:r>
             <a:br/>
             <a:r>
-              <a:t>  - Запись: UnpdStoreFence (_mm_sfence)</a:t>
+              <a:t>  - Барьер сохранения: UnpdStoreFence (_mm_sfence)</a:t>
             </a:r>
             <a:br/>
             <a:r>
-              <a:t>  - Свап буферов: UnpdFastSwapBarrier (mfence)</a:t>
+              <a:t>  - Атомарная смена буферов: UnpdFastSwapBarrier (mfence)</a:t>
             </a:r>
             <a:br/>
             <a:br/>
@@ -5967,35 +5971,31 @@
             </a:r>
             <a:br/>
             <a:r>
-              <a:t>  slot = tail % SHARED_RING_CAPACITY</a:t>
-            </a:r>
-            <a:br/>
-            <a:r>
-              <a:t>  Контроль переполнения: (head - tail) &gt;= CAPACITY</a:t>
-            </a:r>
-          </a:p>
-        </p:txBody>
-      </p:sp>
-      <p:sp>
-        <p:nvSpPr>
-          <p:cNvPr id="8" name="Rounded Rectangle 7"/>
+              <a:t>  Индекс слота вычисляется как slot = tail % CAPACITY с контролем переполнения (head - tail) &gt;= CAPACITY.</a:t>
+            </a:r>
+          </a:p>
+        </p:txBody>
+      </p:sp>
+      <p:sp>
+        <p:nvSpPr>
+          <p:cNvPr id="8" name="Rectangle 7"/>
           <p:cNvSpPr/>
           <p:nvPr/>
         </p:nvSpPr>
         <p:spPr>
           <a:xfrm>
-            <a:off x="6217920" y="1371600"/>
-            <a:ext cx="5212080" cy="4846320"/>
-          </a:xfrm>
-          <a:prstGeom prst="roundRect">
+            <a:off x="6217920" y="1280160"/>
+            <a:ext cx="5212080" cy="4937760"/>
+          </a:xfrm>
+          <a:prstGeom prst="rect">
             <a:avLst/>
           </a:prstGeom>
           <a:solidFill>
-            <a:srgbClr val="161B22"/>
+            <a:srgbClr val="1E293B"/>
           </a:solidFill>
-          <a:ln w="15240">
+          <a:ln w="12700">
             <a:solidFill>
-              <a:srgbClr val="10B981"/>
+              <a:srgbClr val="334155"/>
             </a:solidFill>
           </a:ln>
         </p:spPr>
@@ -6029,8 +6029,8 @@
         </p:nvSpPr>
         <p:spPr>
           <a:xfrm>
-            <a:off x="6400800" y="1508760"/>
-            <a:ext cx="4846320" cy="365760"/>
+            <a:off x="6446520" y="1417319"/>
+            <a:ext cx="4754880" cy="320040"/>
           </a:xfrm>
           <a:prstGeom prst="rect">
             <a:avLst/>
@@ -6044,15 +6044,15 @@
           <a:lstStyle/>
           <a:p>
             <a:pPr>
-              <a:defRPr sz="1300" b="1">
-                <a:solidFill>
-                  <a:srgbClr val="06B6D4"/>
-                </a:solidFill>
-                <a:latin typeface="Segoe UI"/>
-              </a:defRPr>
-            </a:pPr>
-            <a:r>
-              <a:t>📊 Метрики производительности</a:t>
+              <a:defRPr sz="1100" b="1">
+                <a:solidFill>
+                  <a:srgbClr val="60A5FA"/>
+                </a:solidFill>
+                <a:latin typeface="Calibri"/>
+              </a:defRPr>
+            </a:pPr>
+            <a:r>
+              <a:t>ЭКСПЕРИМЕНТАЛЬНЫЕ ЗАДЕРЖКИ (BENCH_LATENCY.PY)</a:t>
             </a:r>
           </a:p>
         </p:txBody>
@@ -6065,8 +6065,8 @@
         </p:nvSpPr>
         <p:spPr>
           <a:xfrm>
-            <a:off x="6400800" y="1828800"/>
-            <a:ext cx="4846320" cy="4114800"/>
+            <a:off x="6446520" y="1783080"/>
+            <a:ext cx="4754880" cy="4206240"/>
           </a:xfrm>
           <a:prstGeom prst="rect">
             <a:avLst/>
@@ -6085,13 +6085,13 @@
               </a:spcAft>
               <a:defRPr sz="1100" b="1">
                 <a:solidFill>
-                  <a:srgbClr val="10B981"/>
-                </a:solidFill>
-                <a:latin typeface="Segoe UI"/>
-              </a:defRPr>
-            </a:pPr>
-            <a:r>
-              <a:t>Результаты микропрофилирования (bench_latency.py, 2000 итераций):</a:t>
+                  <a:srgbClr val="2DD4BF"/>
+                </a:solidFill>
+                <a:latin typeface="Calibri"/>
+              </a:defRPr>
+            </a:pPr>
+            <a:r>
+              <a:t>Результаты микропрофилирования (2000 итераций, субмикросекундная точность):</a:t>
             </a:r>
             <a:br/>
           </a:p>
@@ -6102,9 +6102,9 @@
               </a:spcAft>
               <a:defRPr sz="1000" b="1">
                 <a:solidFill>
-                  <a:srgbClr val="F0F6FC"/>
-                </a:solidFill>
-                <a:latin typeface="Segoe UI"/>
+                  <a:srgbClr val="F8FAFC"/>
+                </a:solidFill>
+                <a:latin typeface="Calibri"/>
               </a:defRPr>
             </a:pPr>
             <a:r>
@@ -6117,10 +6117,10 @@
             <a:r>
               <a:rPr b="0">
                 <a:solidFill>
-                  <a:srgbClr val="06B6D4"/>
+                  <a:srgbClr val="38BDF8"/>
                 </a:solidFill>
               </a:rPr>
-              <a:t>Min: 0.30 µs  |  Mean: 0.39 µs  |  P95: 0.40 µs  |  P99: 0.60 µs</a:t>
+              <a:t>Мин: 0.30 µs  |  Среднее: 0.39 µs  |  P95: 0.40 µs  |  P99: 0.60 µs</a:t>
             </a:r>
           </a:p>
           <a:p>
@@ -6130,13 +6130,13 @@
               </a:spcAft>
               <a:defRPr sz="1000" b="1">
                 <a:solidFill>
-                  <a:srgbClr val="F0F6FC"/>
-                </a:solidFill>
-                <a:latin typeface="Segoe UI"/>
-              </a:defRPr>
-            </a:pPr>
-            <a:r>
-              <a:t>• Atomic Double-Buffer Swap:</a:t>
+                  <a:srgbClr val="F8FAFC"/>
+                </a:solidFill>
+                <a:latin typeface="Calibri"/>
+              </a:defRPr>
+            </a:pPr>
+            <a:r>
+              <a:t>• Атомарная смена буфера (Swap):</a:t>
             </a:r>
             <a:br/>
             <a:r>
@@ -6145,10 +6145,10 @@
             <a:r>
               <a:rPr b="0">
                 <a:solidFill>
-                  <a:srgbClr val="06B6D4"/>
+                  <a:srgbClr val="38BDF8"/>
                 </a:solidFill>
               </a:rPr>
-              <a:t>Min: 4.30 µs  |  Mean: 4.44 µs  |  P95: 4.60 µs  |  P99: 5.10 µs</a:t>
+              <a:t>Мин: 4.30 µs  |  Среднее: 4.44 µs  |  P95: 4.60 µs  |  P99: 5.10 µs</a:t>
             </a:r>
           </a:p>
           <a:p>
@@ -6158,13 +6158,13 @@
               </a:spcAft>
               <a:defRPr sz="1000" b="1">
                 <a:solidFill>
-                  <a:srgbClr val="F0F6FC"/>
-                </a:solidFill>
-                <a:latin typeface="Segoe UI"/>
-              </a:defRPr>
-            </a:pPr>
-            <a:r>
-              <a:t>• Kernel Shared Memory Map:</a:t>
+                  <a:srgbClr val="F8FAFC"/>
+                </a:solidFill>
+                <a:latin typeface="Calibri"/>
+              </a:defRPr>
+            </a:pPr>
+            <a:r>
+              <a:t>• Маппинг памяти в ядре (Map):</a:t>
             </a:r>
             <a:br/>
             <a:r>
@@ -6173,10 +6173,10 @@
             <a:r>
               <a:rPr b="0">
                 <a:solidFill>
-                  <a:srgbClr val="06B6D4"/>
+                  <a:srgbClr val="38BDF8"/>
                 </a:solidFill>
               </a:rPr>
-              <a:t>Min: 0.40 µs  |  Mean: 0.47 µs  |  P95: 0.50 µs  |  P99: 0.70 µs</a:t>
+              <a:t>Мин: 0.40 µs  |  Среднее: 0.47 µs  |  P95: 0.50 µs  |  P99: 0.70 µs</a:t>
             </a:r>
           </a:p>
           <a:p>
@@ -6186,9 +6186,9 @@
               </a:spcAft>
               <a:defRPr sz="1000" b="1">
                 <a:solidFill>
-                  <a:srgbClr val="F0F6FC"/>
-                </a:solidFill>
-                <a:latin typeface="Segoe UI"/>
+                  <a:srgbClr val="F8FAFC"/>
+                </a:solidFill>
+                <a:latin typeface="Calibri"/>
               </a:defRPr>
             </a:pPr>
             <a:r>
@@ -6201,10 +6201,10 @@
             <a:r>
               <a:rPr b="0">
                 <a:solidFill>
-                  <a:srgbClr val="06B6D4"/>
+                  <a:srgbClr val="38BDF8"/>
                 </a:solidFill>
               </a:rPr>
-              <a:t>Zero-Copy кольцо обеспечивает обмен пакетами на субмикросекундных задержках без переключения контекста IRQL.</a:t>
+              <a:t>Механизм Zero-Copy обеспечивает обмен пакетами на субмикросекундных задержках без переключения IRQL и контекста прерываний.</a:t>
             </a:r>
           </a:p>
         </p:txBody>
@@ -6242,7 +6242,7 @@
             <a:avLst/>
           </a:prstGeom>
           <a:solidFill>
-            <a:srgbClr val="0D1117"/>
+            <a:srgbClr val="0F172A"/>
           </a:solidFill>
           <a:ln>
             <a:noFill/>
@@ -6279,7 +6279,7 @@
         <p:spPr>
           <a:xfrm>
             <a:off x="731520" y="365760"/>
-            <a:ext cx="10698480" cy="274320"/>
+            <a:ext cx="10698480" cy="228600"/>
           </a:xfrm>
           <a:prstGeom prst="rect">
             <a:avLst/>
@@ -6293,15 +6293,15 @@
           <a:lstStyle/>
           <a:p>
             <a:pPr>
-              <a:defRPr sz="1100" b="1">
-                <a:solidFill>
-                  <a:srgbClr val="10B981"/>
-                </a:solidFill>
-                <a:latin typeface="Segoe UI"/>
-              </a:defRPr>
-            </a:pPr>
-            <a:r>
-              <a:t>UNPD АКАДЕМИЧЕСКАЯ ЗАЩИТА</a:t>
+              <a:defRPr sz="1000" b="1">
+                <a:solidFill>
+                  <a:srgbClr val="2DD4BF"/>
+                </a:solidFill>
+                <a:latin typeface="Calibri"/>
+              </a:defRPr>
+            </a:pPr>
+            <a:r>
+              <a:t>РАЗДЕЛ 6</a:t>
             </a:r>
           </a:p>
         </p:txBody>
@@ -6314,8 +6314,8 @@
         </p:nvSpPr>
         <p:spPr>
           <a:xfrm>
-            <a:off x="731520" y="640080"/>
-            <a:ext cx="10698480" cy="548640"/>
+            <a:off x="731520" y="594360"/>
+            <a:ext cx="10698480" cy="502920"/>
           </a:xfrm>
           <a:prstGeom prst="rect">
             <a:avLst/>
@@ -6329,39 +6329,39 @@
           <a:lstStyle/>
           <a:p>
             <a:pPr>
-              <a:defRPr sz="2200" b="1">
-                <a:solidFill>
-                  <a:srgbClr val="F0F6FC"/>
-                </a:solidFill>
-                <a:latin typeface="Segoe UI"/>
-              </a:defRPr>
-            </a:pPr>
-            <a:r>
-              <a:t>6. Полиморфная Архитектура Памяти (IMemoryEngine)</a:t>
-            </a:r>
-          </a:p>
-        </p:txBody>
-      </p:sp>
-      <p:sp>
-        <p:nvSpPr>
-          <p:cNvPr id="5" name="Rounded Rectangle 4"/>
+              <a:defRPr sz="2000" b="1">
+                <a:solidFill>
+                  <a:srgbClr val="F8FAFC"/>
+                </a:solidFill>
+                <a:latin typeface="Calibri"/>
+              </a:defRPr>
+            </a:pPr>
+            <a:r>
+              <a:t>Полиморфная стратегия управления памятью (IMemoryEngine)</a:t>
+            </a:r>
+          </a:p>
+        </p:txBody>
+      </p:sp>
+      <p:sp>
+        <p:nvSpPr>
+          <p:cNvPr id="5" name="Rectangle 4"/>
           <p:cNvSpPr/>
           <p:nvPr/>
         </p:nvSpPr>
         <p:spPr>
           <a:xfrm>
-            <a:off x="731520" y="1371600"/>
-            <a:ext cx="5120640" cy="2286000"/>
-          </a:xfrm>
-          <a:prstGeom prst="roundRect">
+            <a:off x="731520" y="1280160"/>
+            <a:ext cx="5120640" cy="2377440"/>
+          </a:xfrm>
+          <a:prstGeom prst="rect">
             <a:avLst/>
           </a:prstGeom>
           <a:solidFill>
-            <a:srgbClr val="161B22"/>
+            <a:srgbClr val="1E293B"/>
           </a:solidFill>
-          <a:ln w="15240">
+          <a:ln w="12700">
             <a:solidFill>
-              <a:srgbClr val="06B6D4"/>
+              <a:srgbClr val="334155"/>
             </a:solidFill>
           </a:ln>
         </p:spPr>
@@ -6395,8 +6395,8 @@
         </p:nvSpPr>
         <p:spPr>
           <a:xfrm>
-            <a:off x="914400" y="1508760"/>
-            <a:ext cx="4754879" cy="365760"/>
+            <a:off x="960120" y="1417319"/>
+            <a:ext cx="4663440" cy="320040"/>
           </a:xfrm>
           <a:prstGeom prst="rect">
             <a:avLst/>
@@ -6410,15 +6410,15 @@
           <a:lstStyle/>
           <a:p>
             <a:pPr>
-              <a:defRPr sz="1300" b="1">
-                <a:solidFill>
-                  <a:srgbClr val="06B6D4"/>
-                </a:solidFill>
-                <a:latin typeface="Segoe UI"/>
-              </a:defRPr>
-            </a:pPr>
-            <a:r>
-              <a:t>1. MdlMemoryEngine (Zero-Copy)</a:t>
+              <a:defRPr sz="1100" b="1">
+                <a:solidFill>
+                  <a:srgbClr val="60A5FA"/>
+                </a:solidFill>
+                <a:latin typeface="Calibri"/>
+              </a:defRPr>
+            </a:pPr>
+            <a:r>
+              <a:t>1. MDLMEMORYENGINE (ZERO-COPY MDL)</a:t>
             </a:r>
           </a:p>
         </p:txBody>
@@ -6431,8 +6431,8 @@
         </p:nvSpPr>
         <p:spPr>
           <a:xfrm>
-            <a:off x="914400" y="1828800"/>
-            <a:ext cx="4754880" cy="1645920"/>
+            <a:off x="960120" y="1737360"/>
+            <a:ext cx="4663440" cy="1737360"/>
           </a:xfrm>
           <a:prstGeom prst="rect">
             <a:avLst/>
@@ -6448,20 +6448,20 @@
             <a:pPr>
               <a:defRPr sz="1000">
                 <a:solidFill>
-                  <a:srgbClr val="F0F6FC"/>
-                </a:solidFill>
-              </a:defRPr>
-            </a:pPr>
-            <a:r>
-              <a:t>• Выделение физических страниц (MmAllocatePagesForMdlEx)</a:t>
+                  <a:srgbClr val="F8FAFC"/>
+                </a:solidFill>
+              </a:defRPr>
+            </a:pPr>
+            <a:r>
+              <a:t>• Выделение физических страниц через MmAllocatePagesForMdlEx</a:t>
             </a:r>
             <a:br/>
             <a:r>
-              <a:t>• Отображение в процесс (MmMapLockedPagesSpecifyCache)</a:t>
+              <a:t>• Отображение в процесс через MmMapLockedPagesSpecifyCache</a:t>
             </a:r>
             <a:br/>
             <a:r>
-              <a:t>• Флаг MdlMappingNoExecute (защита DEP)</a:t>
+              <a:t>• Флаг MdlMappingNoExecute (аппаратная защита DEP)</a:t>
             </a:r>
             <a:br/>
             <a:r>
@@ -6472,24 +6472,24 @@
       </p:sp>
       <p:sp>
         <p:nvSpPr>
-          <p:cNvPr id="8" name="Rounded Rectangle 7"/>
+          <p:cNvPr id="8" name="Rectangle 7"/>
           <p:cNvSpPr/>
           <p:nvPr/>
         </p:nvSpPr>
         <p:spPr>
           <a:xfrm>
-            <a:off x="6217920" y="1371600"/>
-            <a:ext cx="5212080" cy="2286000"/>
-          </a:xfrm>
-          <a:prstGeom prst="roundRect">
+            <a:off x="6217920" y="1280160"/>
+            <a:ext cx="5212080" cy="2377440"/>
+          </a:xfrm>
+          <a:prstGeom prst="rect">
             <a:avLst/>
           </a:prstGeom>
           <a:solidFill>
-            <a:srgbClr val="161B22"/>
+            <a:srgbClr val="1E293B"/>
           </a:solidFill>
-          <a:ln w="15240">
+          <a:ln w="12700">
             <a:solidFill>
-              <a:srgbClr val="10B981"/>
+              <a:srgbClr val="334155"/>
             </a:solidFill>
           </a:ln>
         </p:spPr>
@@ -6523,8 +6523,8 @@
         </p:nvSpPr>
         <p:spPr>
           <a:xfrm>
-            <a:off x="6400800" y="1508760"/>
-            <a:ext cx="4846320" cy="365760"/>
+            <a:off x="6446520" y="1417319"/>
+            <a:ext cx="4754880" cy="320040"/>
           </a:xfrm>
           <a:prstGeom prst="rect">
             <a:avLst/>
@@ -6538,15 +6538,15 @@
           <a:lstStyle/>
           <a:p>
             <a:pPr>
-              <a:defRPr sz="1300" b="1">
-                <a:solidFill>
-                  <a:srgbClr val="06B6D4"/>
-                </a:solidFill>
-                <a:latin typeface="Segoe UI"/>
-              </a:defRPr>
-            </a:pPr>
-            <a:r>
-              <a:t>2. SlabMemoryEngine (Lookaside Caches)</a:t>
+              <a:defRPr sz="1100" b="1">
+                <a:solidFill>
+                  <a:srgbClr val="60A5FA"/>
+                </a:solidFill>
+                <a:latin typeface="Calibri"/>
+              </a:defRPr>
+            </a:pPr>
+            <a:r>
+              <a:t>2. SLABMEMORYENGINE (LOOKASIDE КЭШИ)</a:t>
             </a:r>
           </a:p>
         </p:txBody>
@@ -6559,8 +6559,8 @@
         </p:nvSpPr>
         <p:spPr>
           <a:xfrm>
-            <a:off x="6400800" y="1828800"/>
-            <a:ext cx="4846320" cy="1645920"/>
+            <a:off x="6446520" y="1737360"/>
+            <a:ext cx="4754880" cy="1737360"/>
           </a:xfrm>
           <a:prstGeom prst="rect">
             <a:avLst/>
@@ -6576,7 +6576,7 @@
             <a:pPr>
               <a:defRPr sz="1000">
                 <a:solidFill>
-                  <a:srgbClr val="F0F6FC"/>
+                  <a:srgbClr val="F8FAFC"/>
                 </a:solidFill>
               </a:defRPr>
             </a:pPr>
@@ -6600,24 +6600,24 @@
       </p:sp>
       <p:sp>
         <p:nvSpPr>
-          <p:cNvPr id="11" name="Rounded Rectangle 10"/>
+          <p:cNvPr id="11" name="Rectangle 10"/>
           <p:cNvSpPr/>
           <p:nvPr/>
         </p:nvSpPr>
         <p:spPr>
           <a:xfrm>
-            <a:off x="731520" y="3931920"/>
-            <a:ext cx="5120640" cy="2286000"/>
-          </a:xfrm>
-          <a:prstGeom prst="roundRect">
+            <a:off x="731520" y="3840480"/>
+            <a:ext cx="5120640" cy="2377440"/>
+          </a:xfrm>
+          <a:prstGeom prst="rect">
             <a:avLst/>
           </a:prstGeom>
           <a:solidFill>
-            <a:srgbClr val="161B22"/>
+            <a:srgbClr val="1E293B"/>
           </a:solidFill>
-          <a:ln w="15240">
+          <a:ln w="12700">
             <a:solidFill>
-              <a:srgbClr val="A855F7"/>
+              <a:srgbClr val="334155"/>
             </a:solidFill>
           </a:ln>
         </p:spPr>
@@ -6651,8 +6651,8 @@
         </p:nvSpPr>
         <p:spPr>
           <a:xfrm>
-            <a:off x="914400" y="4069080"/>
-            <a:ext cx="4754879" cy="365760"/>
+            <a:off x="960120" y="3977640"/>
+            <a:ext cx="4663440" cy="320040"/>
           </a:xfrm>
           <a:prstGeom prst="rect">
             <a:avLst/>
@@ -6666,15 +6666,15 @@
           <a:lstStyle/>
           <a:p>
             <a:pPr>
-              <a:defRPr sz="1300" b="1">
-                <a:solidFill>
-                  <a:srgbClr val="06B6D4"/>
-                </a:solidFill>
-                <a:latin typeface="Segoe UI"/>
-              </a:defRPr>
-            </a:pPr>
-            <a:r>
-              <a:t>3. PoolMemoryEngine (Tracked NonPaged)</a:t>
+              <a:defRPr sz="1100" b="1">
+                <a:solidFill>
+                  <a:srgbClr val="60A5FA"/>
+                </a:solidFill>
+                <a:latin typeface="Calibri"/>
+              </a:defRPr>
+            </a:pPr>
+            <a:r>
+              <a:t>3. POOLMEMORYENGINE (TRACKED NONPAGED)</a:t>
             </a:r>
           </a:p>
         </p:txBody>
@@ -6687,8 +6687,8 @@
         </p:nvSpPr>
         <p:spPr>
           <a:xfrm>
-            <a:off x="914400" y="4389120"/>
-            <a:ext cx="4754880" cy="1645920"/>
+            <a:off x="960120" y="4297680"/>
+            <a:ext cx="4663440" cy="1737360"/>
           </a:xfrm>
           <a:prstGeom prst="rect">
             <a:avLst/>
@@ -6704,7 +6704,7 @@
             <a:pPr>
               <a:defRPr sz="1000">
                 <a:solidFill>
-                  <a:srgbClr val="F0F6FC"/>
+                  <a:srgbClr val="F8FAFC"/>
                 </a:solidFill>
               </a:defRPr>
             </a:pPr>
@@ -6717,7 +6717,7 @@
             </a:r>
             <a:br/>
             <a:r>
-              <a:t>• Отслеживание активных аллокаций и телеметрия объема</a:t>
+              <a:t>• Отслеживание активных аллокаций и глобальная телеметрия</a:t>
             </a:r>
             <a:br/>
             <a:r>
@@ -6728,24 +6728,24 @@
       </p:sp>
       <p:sp>
         <p:nvSpPr>
-          <p:cNvPr id="14" name="Rounded Rectangle 13"/>
+          <p:cNvPr id="14" name="Rectangle 13"/>
           <p:cNvSpPr/>
           <p:nvPr/>
         </p:nvSpPr>
         <p:spPr>
           <a:xfrm>
-            <a:off x="6217920" y="3931920"/>
-            <a:ext cx="5212080" cy="2286000"/>
-          </a:xfrm>
-          <a:prstGeom prst="roundRect">
+            <a:off x="6217920" y="3840480"/>
+            <a:ext cx="5212080" cy="2377440"/>
+          </a:xfrm>
+          <a:prstGeom prst="rect">
             <a:avLst/>
           </a:prstGeom>
           <a:solidFill>
-            <a:srgbClr val="161B22"/>
+            <a:srgbClr val="1E293B"/>
           </a:solidFill>
-          <a:ln w="15240">
+          <a:ln w="12700">
             <a:solidFill>
-              <a:srgbClr val="3B82F6"/>
+              <a:srgbClr val="334155"/>
             </a:solidFill>
           </a:ln>
         </p:spPr>
@@ -6779,8 +6779,8 @@
         </p:nvSpPr>
         <p:spPr>
           <a:xfrm>
-            <a:off x="6400800" y="4069080"/>
-            <a:ext cx="4846320" cy="365760"/>
+            <a:off x="6446520" y="3977640"/>
+            <a:ext cx="4754880" cy="320040"/>
           </a:xfrm>
           <a:prstGeom prst="rect">
             <a:avLst/>
@@ -6794,15 +6794,15 @@
           <a:lstStyle/>
           <a:p>
             <a:pPr>
-              <a:defRPr sz="1300" b="1">
-                <a:solidFill>
-                  <a:srgbClr val="06B6D4"/>
-                </a:solidFill>
-                <a:latin typeface="Segoe UI"/>
-              </a:defRPr>
-            </a:pPr>
-            <a:r>
-              <a:t>4. DirectNeitherEngine (SEH Probed)</a:t>
+              <a:defRPr sz="1100" b="1">
+                <a:solidFill>
+                  <a:srgbClr val="60A5FA"/>
+                </a:solidFill>
+                <a:latin typeface="Calibri"/>
+              </a:defRPr>
+            </a:pPr>
+            <a:r>
+              <a:t>4. DIRECTNEITHERENGINE (SEH PROBED)</a:t>
             </a:r>
           </a:p>
         </p:txBody>
@@ -6815,8 +6815,8 @@
         </p:nvSpPr>
         <p:spPr>
           <a:xfrm>
-            <a:off x="6400800" y="4389120"/>
-            <a:ext cx="4846320" cy="1645920"/>
+            <a:off x="6446520" y="4297680"/>
+            <a:ext cx="4754880" cy="1737360"/>
           </a:xfrm>
           <a:prstGeom prst="rect">
             <a:avLst/>
@@ -6832,7 +6832,7 @@
             <a:pPr>
               <a:defRPr sz="1000">
                 <a:solidFill>
-                  <a:srgbClr val="F0F6FC"/>
+                  <a:srgbClr val="F8FAFC"/>
                 </a:solidFill>
               </a:defRPr>
             </a:pPr>
@@ -6887,7 +6887,7 @@
             <a:avLst/>
           </a:prstGeom>
           <a:solidFill>
-            <a:srgbClr val="0D1117"/>
+            <a:srgbClr val="0F172A"/>
           </a:solidFill>
           <a:ln>
             <a:noFill/>
@@ -6924,7 +6924,7 @@
         <p:spPr>
           <a:xfrm>
             <a:off x="731520" y="365760"/>
-            <a:ext cx="10698480" cy="274320"/>
+            <a:ext cx="10698480" cy="228600"/>
           </a:xfrm>
           <a:prstGeom prst="rect">
             <a:avLst/>
@@ -6938,15 +6938,15 @@
           <a:lstStyle/>
           <a:p>
             <a:pPr>
-              <a:defRPr sz="1100" b="1">
-                <a:solidFill>
-                  <a:srgbClr val="10B981"/>
-                </a:solidFill>
-                <a:latin typeface="Segoe UI"/>
-              </a:defRPr>
-            </a:pPr>
-            <a:r>
-              <a:t>UNPD АКАДЕМИЧЕСКАЯ ЗАЩИТА</a:t>
+              <a:defRPr sz="1000" b="1">
+                <a:solidFill>
+                  <a:srgbClr val="2DD4BF"/>
+                </a:solidFill>
+                <a:latin typeface="Calibri"/>
+              </a:defRPr>
+            </a:pPr>
+            <a:r>
+              <a:t>РАЗДЕЛ 7</a:t>
             </a:r>
           </a:p>
         </p:txBody>
@@ -6959,8 +6959,8 @@
         </p:nvSpPr>
         <p:spPr>
           <a:xfrm>
-            <a:off x="731520" y="640080"/>
-            <a:ext cx="10698480" cy="548640"/>
+            <a:off x="731520" y="594360"/>
+            <a:ext cx="10698480" cy="502920"/>
           </a:xfrm>
           <a:prstGeom prst="rect">
             <a:avLst/>
@@ -6974,39 +6974,39 @@
           <a:lstStyle/>
           <a:p>
             <a:pPr>
-              <a:defRPr sz="2200" b="1">
-                <a:solidFill>
-                  <a:srgbClr val="F0F6FC"/>
-                </a:solidFill>
-                <a:latin typeface="Segoe UI"/>
-              </a:defRPr>
-            </a:pPr>
-            <a:r>
-              <a:t>7. Доказательство Отказоустойчивости (Zero-BSOD Invariants)</a:t>
-            </a:r>
-          </a:p>
-        </p:txBody>
-      </p:sp>
-      <p:sp>
-        <p:nvSpPr>
-          <p:cNvPr id="5" name="Rounded Rectangle 4"/>
+              <a:defRPr sz="2000" b="1">
+                <a:solidFill>
+                  <a:srgbClr val="F8FAFC"/>
+                </a:solidFill>
+                <a:latin typeface="Calibri"/>
+              </a:defRPr>
+            </a:pPr>
+            <a:r>
+              <a:t>Доказательство отказоустойчивости ядра (Zero-BSOD Invariants)</a:t>
+            </a:r>
+          </a:p>
+        </p:txBody>
+      </p:sp>
+      <p:sp>
+        <p:nvSpPr>
+          <p:cNvPr id="5" name="Rectangle 4"/>
           <p:cNvSpPr/>
           <p:nvPr/>
         </p:nvSpPr>
         <p:spPr>
           <a:xfrm>
-            <a:off x="731520" y="1371600"/>
-            <a:ext cx="10698480" cy="4846320"/>
-          </a:xfrm>
-          <a:prstGeom prst="roundRect">
+            <a:off x="731520" y="1280160"/>
+            <a:ext cx="10698480" cy="4937760"/>
+          </a:xfrm>
+          <a:prstGeom prst="rect">
             <a:avLst/>
           </a:prstGeom>
           <a:solidFill>
-            <a:srgbClr val="161B22"/>
+            <a:srgbClr val="1E293B"/>
           </a:solidFill>
-          <a:ln w="15240">
+          <a:ln w="12700">
             <a:solidFill>
-              <a:srgbClr val="10B981"/>
+              <a:srgbClr val="334155"/>
             </a:solidFill>
           </a:ln>
         </p:spPr>
@@ -7040,8 +7040,8 @@
         </p:nvSpPr>
         <p:spPr>
           <a:xfrm>
-            <a:off x="914400" y="1508760"/>
-            <a:ext cx="10332719" cy="365760"/>
+            <a:off x="960120" y="1417319"/>
+            <a:ext cx="10241280" cy="320040"/>
           </a:xfrm>
           <a:prstGeom prst="rect">
             <a:avLst/>
@@ -7055,15 +7055,15 @@
           <a:lstStyle/>
           <a:p>
             <a:pPr>
-              <a:defRPr sz="1300" b="1">
-                <a:solidFill>
-                  <a:srgbClr val="06B6D4"/>
-                </a:solidFill>
-                <a:latin typeface="Segoe UI"/>
-              </a:defRPr>
-            </a:pPr>
-            <a:r>
-              <a:t>🛡️ Матрица нейтрализации системных сбоев ядра Windows (BugCheck Defense)</a:t>
+              <a:defRPr sz="1100" b="1">
+                <a:solidFill>
+                  <a:srgbClr val="60A5FA"/>
+                </a:solidFill>
+                <a:latin typeface="Calibri"/>
+              </a:defRPr>
+            </a:pPr>
+            <a:r>
+              <a:t>МАТРИЦА НЕЙТРАЛИЗАЦИИ СИСТЕМНЫХ КОДОВ BUGCHECK</a:t>
             </a:r>
           </a:p>
         </p:txBody>
@@ -7076,8 +7076,8 @@
         </p:nvSpPr>
         <p:spPr>
           <a:xfrm>
-            <a:off x="914400" y="1828800"/>
-            <a:ext cx="10332720" cy="4206240"/>
+            <a:off x="960120" y="1783080"/>
+            <a:ext cx="10241280" cy="4297680"/>
           </a:xfrm>
           <a:prstGeom prst="rect">
             <a:avLst/>
@@ -7096,9 +7096,9 @@
               </a:spcAft>
               <a:defRPr sz="1050" b="1">
                 <a:solidFill>
-                  <a:srgbClr val="10B981"/>
-                </a:solidFill>
-                <a:latin typeface="Segoe UI"/>
+                  <a:srgbClr val="2DD4BF"/>
+                </a:solidFill>
+                <a:latin typeface="Calibri"/>
               </a:defRPr>
             </a:pPr>
             <a:r>
@@ -7110,7 +7110,7 @@
                   <a:srgbClr val="94A3B8"/>
                 </a:solidFill>
               </a:rPr>
-              <a:t>Все пулы памяти и структуры данных строго аллоцируются с флагом POOL_FLAG_NON_PAGED. Код, исполняемый на DISPATCH_LEVEL, никогда не обращается к выгружаемой (Paged) памяти.</a:t>
+              <a:t>Все пулы памяти и структуры данных строго аллоцируются с флагом POOL_FLAG_NON_PAGED. Код, исполняемый на DISPATCH_LEVEL, гарантированно не обращается к выгружаемой (Paged) памяти.</a:t>
             </a:r>
           </a:p>
           <a:p>
@@ -7120,9 +7120,9 @@
               </a:spcAft>
               <a:defRPr sz="1050" b="1">
                 <a:solidFill>
-                  <a:srgbClr val="10B981"/>
-                </a:solidFill>
-                <a:latin typeface="Segoe UI"/>
+                  <a:srgbClr val="2DD4BF"/>
+                </a:solidFill>
+                <a:latin typeface="Calibri"/>
               </a:defRPr>
             </a:pPr>
             <a:r>
@@ -7144,9 +7144,9 @@
               </a:spcAft>
               <a:defRPr sz="1050" b="1">
                 <a:solidFill>
-                  <a:srgbClr val="10B981"/>
-                </a:solidFill>
-                <a:latin typeface="Segoe UI"/>
+                  <a:srgbClr val="2DD4BF"/>
+                </a:solidFill>
+                <a:latin typeface="Calibri"/>
               </a:defRPr>
             </a:pPr>
             <a:r>
@@ -7168,9 +7168,9 @@
               </a:spcAft>
               <a:defRPr sz="1050" b="1">
                 <a:solidFill>
-                  <a:srgbClr val="10B981"/>
-                </a:solidFill>
-                <a:latin typeface="Segoe UI"/>
+                  <a:srgbClr val="2DD4BF"/>
+                </a:solidFill>
+                <a:latin typeface="Calibri"/>
               </a:defRPr>
             </a:pPr>
             <a:r>
@@ -7192,9 +7192,9 @@
               </a:spcAft>
               <a:defRPr sz="1050" b="1">
                 <a:solidFill>
-                  <a:srgbClr val="10B981"/>
-                </a:solidFill>
-                <a:latin typeface="Segoe UI"/>
+                  <a:srgbClr val="2DD4BF"/>
+                </a:solidFill>
+                <a:latin typeface="Calibri"/>
               </a:defRPr>
             </a:pPr>
             <a:r>
@@ -7216,9 +7216,9 @@
               </a:spcAft>
               <a:defRPr sz="1050" b="1">
                 <a:solidFill>
-                  <a:srgbClr val="10B981"/>
-                </a:solidFill>
-                <a:latin typeface="Segoe UI"/>
+                  <a:srgbClr val="2DD4BF"/>
+                </a:solidFill>
+                <a:latin typeface="Calibri"/>
               </a:defRPr>
             </a:pPr>
             <a:r>
@@ -7230,7 +7230,7 @@
                   <a:srgbClr val="94A3B8"/>
                 </a:solidFill>
               </a:rPr>
-              <a:t>Отсутствие статических перехватов (Zero Static Hooks); все манипуляции используют нативные AVL-таблицы и безопасные структуры ядра.</a:t>
+              <a:t>Отсутствие статических перехватов (Zero Static Hooks); все манипуляции используют нативные AVL-таблицы ядра.</a:t>
             </a:r>
           </a:p>
         </p:txBody>
@@ -7268,7 +7268,7 @@
             <a:avLst/>
           </a:prstGeom>
           <a:solidFill>
-            <a:srgbClr val="0D1117"/>
+            <a:srgbClr val="0F172A"/>
           </a:solidFill>
           <a:ln>
             <a:noFill/>
@@ -7305,7 +7305,7 @@
         <p:spPr>
           <a:xfrm>
             <a:off x="731520" y="365760"/>
-            <a:ext cx="10698480" cy="274320"/>
+            <a:ext cx="10698480" cy="228600"/>
           </a:xfrm>
           <a:prstGeom prst="rect">
             <a:avLst/>
@@ -7319,15 +7319,15 @@
           <a:lstStyle/>
           <a:p>
             <a:pPr>
-              <a:defRPr sz="1100" b="1">
-                <a:solidFill>
-                  <a:srgbClr val="10B981"/>
-                </a:solidFill>
-                <a:latin typeface="Segoe UI"/>
-              </a:defRPr>
-            </a:pPr>
-            <a:r>
-              <a:t>UNPD АКАДЕМИЧЕСКАЯ ЗАЩИТА</a:t>
+              <a:defRPr sz="1000" b="1">
+                <a:solidFill>
+                  <a:srgbClr val="2DD4BF"/>
+                </a:solidFill>
+                <a:latin typeface="Calibri"/>
+              </a:defRPr>
+            </a:pPr>
+            <a:r>
+              <a:t>РАЗДЕЛ 8</a:t>
             </a:r>
           </a:p>
         </p:txBody>
@@ -7340,8 +7340,8 @@
         </p:nvSpPr>
         <p:spPr>
           <a:xfrm>
-            <a:off x="731520" y="640080"/>
-            <a:ext cx="10698480" cy="548640"/>
+            <a:off x="731520" y="594360"/>
+            <a:ext cx="10698480" cy="502920"/>
           </a:xfrm>
           <a:prstGeom prst="rect">
             <a:avLst/>
@@ -7355,39 +7355,39 @@
           <a:lstStyle/>
           <a:p>
             <a:pPr>
-              <a:defRPr sz="2200" b="1">
-                <a:solidFill>
-                  <a:srgbClr val="F0F6FC"/>
-                </a:solidFill>
-                <a:latin typeface="Segoe UI"/>
-              </a:defRPr>
-            </a:pPr>
-            <a:r>
-              <a:t>8. Экспериментальная Верификация и Результаты Тестов</a:t>
-            </a:r>
-          </a:p>
-        </p:txBody>
-      </p:sp>
-      <p:sp>
-        <p:nvSpPr>
-          <p:cNvPr id="5" name="Rounded Rectangle 4"/>
+              <a:defRPr sz="2000" b="1">
+                <a:solidFill>
+                  <a:srgbClr val="F8FAFC"/>
+                </a:solidFill>
+                <a:latin typeface="Calibri"/>
+              </a:defRPr>
+            </a:pPr>
+            <a:r>
+              <a:t>Результаты экспериментальной верификации</a:t>
+            </a:r>
+          </a:p>
+        </p:txBody>
+      </p:sp>
+      <p:sp>
+        <p:nvSpPr>
+          <p:cNvPr id="5" name="Rectangle 4"/>
           <p:cNvSpPr/>
           <p:nvPr/>
         </p:nvSpPr>
         <p:spPr>
           <a:xfrm>
-            <a:off x="731520" y="1371600"/>
-            <a:ext cx="3383280" cy="4846320"/>
-          </a:xfrm>
-          <a:prstGeom prst="roundRect">
+            <a:off x="731520" y="1280160"/>
+            <a:ext cx="3383280" cy="4937760"/>
+          </a:xfrm>
+          <a:prstGeom prst="rect">
             <a:avLst/>
           </a:prstGeom>
           <a:solidFill>
-            <a:srgbClr val="161B22"/>
+            <a:srgbClr val="1E293B"/>
           </a:solidFill>
-          <a:ln w="15240">
+          <a:ln w="12700">
             <a:solidFill>
-              <a:srgbClr val="10B981"/>
+              <a:srgbClr val="334155"/>
             </a:solidFill>
           </a:ln>
         </p:spPr>
@@ -7421,8 +7421,8 @@
         </p:nvSpPr>
         <p:spPr>
           <a:xfrm>
-            <a:off x="914400" y="1508760"/>
-            <a:ext cx="3017520" cy="365760"/>
+            <a:off x="960120" y="1417319"/>
+            <a:ext cx="2926080" cy="320040"/>
           </a:xfrm>
           <a:prstGeom prst="rect">
             <a:avLst/>
@@ -7436,15 +7436,15 @@
           <a:lstStyle/>
           <a:p>
             <a:pPr>
-              <a:defRPr sz="1300" b="1">
-                <a:solidFill>
-                  <a:srgbClr val="06B6D4"/>
-                </a:solidFill>
-                <a:latin typeface="Segoe UI"/>
-              </a:defRPr>
-            </a:pPr>
-            <a:r>
-              <a:t>🧪 GoogleTest (73/73)</a:t>
+              <a:defRPr sz="1100" b="1">
+                <a:solidFill>
+                  <a:srgbClr val="60A5FA"/>
+                </a:solidFill>
+                <a:latin typeface="Calibri"/>
+              </a:defRPr>
+            </a:pPr>
+            <a:r>
+              <a:t>GOOGLETEST (73/73 УСПЕШНО)</a:t>
             </a:r>
           </a:p>
         </p:txBody>
@@ -7457,8 +7457,8 @@
         </p:nvSpPr>
         <p:spPr>
           <a:xfrm>
-            <a:off x="868680" y="1828800"/>
-            <a:ext cx="3108960" cy="4114800"/>
+            <a:off x="914400" y="1783080"/>
+            <a:ext cx="3017520" cy="4206240"/>
           </a:xfrm>
           <a:prstGeom prst="rect">
             <a:avLst/>
@@ -7474,7 +7474,7 @@
             <a:pPr>
               <a:defRPr sz="1000">
                 <a:solidFill>
-                  <a:srgbClr val="F0F6FC"/>
+                  <a:srgbClr val="F8FAFC"/>
                 </a:solidFill>
               </a:defRPr>
             </a:pPr>
@@ -7530,24 +7530,24 @@
       </p:sp>
       <p:sp>
         <p:nvSpPr>
-          <p:cNvPr id="8" name="Rounded Rectangle 7"/>
+          <p:cNvPr id="8" name="Rectangle 7"/>
           <p:cNvSpPr/>
           <p:nvPr/>
         </p:nvSpPr>
         <p:spPr>
           <a:xfrm>
-            <a:off x="4389120" y="1371600"/>
-            <a:ext cx="3383280" cy="4846320"/>
-          </a:xfrm>
-          <a:prstGeom prst="roundRect">
+            <a:off x="4389120" y="1280160"/>
+            <a:ext cx="3383280" cy="4937760"/>
+          </a:xfrm>
+          <a:prstGeom prst="rect">
             <a:avLst/>
           </a:prstGeom>
           <a:solidFill>
-            <a:srgbClr val="161B22"/>
+            <a:srgbClr val="1E293B"/>
           </a:solidFill>
-          <a:ln w="15240">
+          <a:ln w="12700">
             <a:solidFill>
-              <a:srgbClr val="06B6D4"/>
+              <a:srgbClr val="334155"/>
             </a:solidFill>
           </a:ln>
         </p:spPr>
@@ -7581,8 +7581,8 @@
         </p:nvSpPr>
         <p:spPr>
           <a:xfrm>
-            <a:off x="4572000" y="1508760"/>
-            <a:ext cx="3017520" cy="365760"/>
+            <a:off x="4617720" y="1417319"/>
+            <a:ext cx="2926080" cy="320040"/>
           </a:xfrm>
           <a:prstGeom prst="rect">
             <a:avLst/>
@@ -7596,15 +7596,15 @@
           <a:lstStyle/>
           <a:p>
             <a:pPr>
-              <a:defRPr sz="1300" b="1">
-                <a:solidFill>
-                  <a:srgbClr val="06B6D4"/>
-                </a:solidFill>
-                <a:latin typeface="Segoe UI"/>
-              </a:defRPr>
-            </a:pPr>
-            <a:r>
-              <a:t>🐍 Python &amp; Fuzzing (8/8)</a:t>
+              <a:defRPr sz="1100" b="1">
+                <a:solidFill>
+                  <a:srgbClr val="60A5FA"/>
+                </a:solidFill>
+                <a:latin typeface="Calibri"/>
+              </a:defRPr>
+            </a:pPr>
+            <a:r>
+              <a:t>PYTHON &amp; FUZZING (8/8 УСПЕШНО)</a:t>
             </a:r>
           </a:p>
         </p:txBody>
@@ -7617,8 +7617,8 @@
         </p:nvSpPr>
         <p:spPr>
           <a:xfrm>
-            <a:off x="4526280" y="1828800"/>
-            <a:ext cx="3108960" cy="4114800"/>
+            <a:off x="4572000" y="1783080"/>
+            <a:ext cx="3017520" cy="4206240"/>
           </a:xfrm>
           <a:prstGeom prst="rect">
             <a:avLst/>
@@ -7634,7 +7634,7 @@
             <a:pPr>
               <a:defRPr sz="1000">
                 <a:solidFill>
-                  <a:srgbClr val="F0F6FC"/>
+                  <a:srgbClr val="F8FAFC"/>
                 </a:solidFill>
               </a:defRPr>
             </a:pPr>
@@ -7686,24 +7686,24 @@
       </p:sp>
       <p:sp>
         <p:nvSpPr>
-          <p:cNvPr id="11" name="Rounded Rectangle 10"/>
+          <p:cNvPr id="11" name="Rectangle 10"/>
           <p:cNvSpPr/>
           <p:nvPr/>
         </p:nvSpPr>
         <p:spPr>
           <a:xfrm>
-            <a:off x="8046720" y="1371600"/>
-            <a:ext cx="3383280" cy="4846320"/>
-          </a:xfrm>
-          <a:prstGeom prst="roundRect">
+            <a:off x="8046720" y="1280160"/>
+            <a:ext cx="3383280" cy="4937760"/>
+          </a:xfrm>
+          <a:prstGeom prst="rect">
             <a:avLst/>
           </a:prstGeom>
           <a:solidFill>
-            <a:srgbClr val="161B22"/>
+            <a:srgbClr val="1E293B"/>
           </a:solidFill>
-          <a:ln w="15240">
+          <a:ln w="12700">
             <a:solidFill>
-              <a:srgbClr val="A855F7"/>
+              <a:srgbClr val="334155"/>
             </a:solidFill>
           </a:ln>
         </p:spPr>
@@ -7737,8 +7737,8 @@
         </p:nvSpPr>
         <p:spPr>
           <a:xfrm>
-            <a:off x="8229600" y="1508760"/>
-            <a:ext cx="3017520" cy="365760"/>
+            <a:off x="8275320" y="1417319"/>
+            <a:ext cx="2926080" cy="320040"/>
           </a:xfrm>
           <a:prstGeom prst="rect">
             <a:avLst/>
@@ -7752,15 +7752,15 @@
           <a:lstStyle/>
           <a:p>
             <a:pPr>
-              <a:defRPr sz="1300" b="1">
-                <a:solidFill>
-                  <a:srgbClr val="06B6D4"/>
-                </a:solidFill>
-                <a:latin typeface="Segoe UI"/>
-              </a:defRPr>
-            </a:pPr>
-            <a:r>
-              <a:t>🚀 GitHub CI Matrix (6/6)</a:t>
+              <a:defRPr sz="1100" b="1">
+                <a:solidFill>
+                  <a:srgbClr val="60A5FA"/>
+                </a:solidFill>
+                <a:latin typeface="Calibri"/>
+              </a:defRPr>
+            </a:pPr>
+            <a:r>
+              <a:t>GITHUB CI MATRIX (6/6 ЗЕЛЕНЫЙ)</a:t>
             </a:r>
           </a:p>
         </p:txBody>
@@ -7773,8 +7773,8 @@
         </p:nvSpPr>
         <p:spPr>
           <a:xfrm>
-            <a:off x="8183879" y="1828800"/>
-            <a:ext cx="3108960" cy="4114800"/>
+            <a:off x="8229600" y="1783080"/>
+            <a:ext cx="3017520" cy="4206240"/>
           </a:xfrm>
           <a:prstGeom prst="rect">
             <a:avLst/>
@@ -7790,7 +7790,7 @@
             <a:pPr>
               <a:defRPr sz="1000">
                 <a:solidFill>
-                  <a:srgbClr val="F0F6FC"/>
+                  <a:srgbClr val="F8FAFC"/>
                 </a:solidFill>
               </a:defRPr>
             </a:pPr>
